--- a/LinkX_Pitch_Deck.pptx
+++ b/LinkX_Pitch_Deck.pptx
@@ -12,9 +12,6 @@
     <p:sldId id="260" r:id="rId11"/>
     <p:sldId id="261" r:id="rId12"/>
     <p:sldId id="262" r:id="rId13"/>
-    <p:sldId id="263" r:id="rId14"/>
-    <p:sldId id="264" r:id="rId15"/>
-    <p:sldId id="265" r:id="rId16"/>
   </p:sldIdLst>
   <p:sldSz cx="12191695" cy="6858000" type="screen4x3"/>
   <p:notesSz cx="6858000" cy="9144000"/>
@@ -3112,11 +3109,11 @@
             <a:avLst/>
           </a:prstGeom>
           <a:solidFill>
-            <a:srgbClr val="040712"/>
+            <a:srgbClr val="030611"/>
           </a:solidFill>
           <a:ln>
             <a:solidFill>
-              <a:srgbClr val="040712"/>
+              <a:srgbClr val="030611"/>
             </a:solidFill>
           </a:ln>
         </p:spPr>
@@ -3150,14 +3147,14 @@
         </p:nvSpPr>
         <p:spPr>
           <a:xfrm>
-            <a:off x="1371600" y="1097280"/>
-            <a:ext cx="9448495" cy="4663440"/>
+            <a:off x="914400" y="822960"/>
+            <a:ext cx="10362895" cy="5212080"/>
           </a:xfrm>
           <a:prstGeom prst="roundRect">
             <a:avLst/>
           </a:prstGeom>
           <a:solidFill>
-            <a:srgbClr val="0C1326"/>
+            <a:srgbClr val="0A1024"/>
           </a:solidFill>
           <a:ln w="19050">
             <a:solidFill>
@@ -3195,8 +3192,8 @@
         </p:nvSpPr>
         <p:spPr>
           <a:xfrm>
-            <a:off x="1828800" y="1463040"/>
-            <a:ext cx="8534095" cy="1097280"/>
+            <a:off x="1371600" y="1097280"/>
+            <a:ext cx="9448495" cy="365760"/>
           </a:xfrm>
           <a:prstGeom prst="rect">
             <a:avLst/>
@@ -3217,7 +3214,7 @@
               </a:defRPr>
             </a:pPr>
             <a:r>
-              <a:t>TRACK 1: ALUMNI NETWORK &amp; CONNECTIONS</a:t>
+              <a:t>🏛️ HACKSHIFT HACKATHON  •  IIIT DELHI   |   24-HOUR HACKATHON PROJECT</a:t>
             </a:r>
           </a:p>
         </p:txBody>
@@ -3230,8 +3227,8 @@
         </p:nvSpPr>
         <p:spPr>
           <a:xfrm>
-            <a:off x="1828800" y="1920240"/>
-            <a:ext cx="8534095" cy="1371600"/>
+            <a:off x="1371600" y="1463040"/>
+            <a:ext cx="9448495" cy="320040"/>
           </a:xfrm>
           <a:prstGeom prst="rect">
             <a:avLst/>
@@ -3244,22 +3241,15 @@
           </a:bodyPr>
           <a:lstStyle/>
           <a:p>
-            <a:pPr algn="ctr"/>
-            <a:r>
-              <a:rPr sz="6400" b="1">
-                <a:solidFill>
-                  <a:srgbClr val="F8FAFC"/>
-                </a:solidFill>
-              </a:rPr>
-              <a:t>Link</a:t>
-            </a:r>
-            <a:r>
-              <a:rPr sz="7200" b="1" i="1">
+            <a:pPr algn="ctr">
+              <a:defRPr sz="950" b="1">
                 <a:solidFill>
                   <a:srgbClr val="38BDF8"/>
                 </a:solidFill>
-              </a:rPr>
-              <a:t>X</a:t>
+              </a:defRPr>
+            </a:pPr>
+            <a:r>
+              <a:t>TRACK 1: ALUMNI NETWORK &amp; AI-POWERED MENTORSHIP MATCHING</a:t>
             </a:r>
           </a:p>
         </p:txBody>
@@ -3272,8 +3262,8 @@
         </p:nvSpPr>
         <p:spPr>
           <a:xfrm>
-            <a:off x="1828800" y="3291840"/>
-            <a:ext cx="8534095" cy="731520"/>
+            <a:off x="1371600" y="1828800"/>
+            <a:ext cx="9448495" cy="1280160"/>
           </a:xfrm>
           <a:prstGeom prst="rect">
             <a:avLst/>
@@ -3286,27 +3276,22 @@
           </a:bodyPr>
           <a:lstStyle/>
           <a:p>
-            <a:pPr algn="ctr">
-              <a:defRPr sz="2000" b="1">
-                <a:solidFill>
-                  <a:srgbClr val="C084FC"/>
-                </a:solidFill>
-              </a:defRPr>
-            </a:pPr>
-            <a:r>
-              <a:t>Building a Living Network, Not a Dead Directory.</a:t>
-            </a:r>
-          </a:p>
-          <a:p>
-            <a:pPr algn="ctr">
-              <a:defRPr sz="1300">
-                <a:solidFill>
-                  <a:srgbClr val="94A3B8"/>
-                </a:solidFill>
-              </a:defRPr>
-            </a:pPr>
-            <a:r>
-              <a:t>Autonomous Campus &amp; Alumni Intent Network powered by Verified Proof-of-Work</a:t>
+            <a:pPr algn="ctr"/>
+            <a:r>
+              <a:rPr sz="6400" b="1">
+                <a:solidFill>
+                  <a:srgbClr val="F8FAFC"/>
+                </a:solidFill>
+              </a:rPr>
+              <a:t>Link</a:t>
+            </a:r>
+            <a:r>
+              <a:rPr sz="7200" b="1" i="1">
+                <a:solidFill>
+                  <a:srgbClr val="38BDF8"/>
+                </a:solidFill>
+              </a:rPr>
+              <a:t>X</a:t>
             </a:r>
           </a:p>
         </p:txBody>
@@ -3319,8 +3304,8 @@
         </p:nvSpPr>
         <p:spPr>
           <a:xfrm>
-            <a:off x="1828800" y="4297680"/>
-            <a:ext cx="8534095" cy="731520"/>
+            <a:off x="1371600" y="3108960"/>
+            <a:ext cx="9448495" cy="822960"/>
           </a:xfrm>
           <a:prstGeom prst="rect">
             <a:avLst/>
@@ -3334,207 +3319,85 @@
           <a:lstStyle/>
           <a:p>
             <a:pPr algn="ctr">
-              <a:defRPr sz="1200" b="1">
-                <a:solidFill>
-                  <a:srgbClr val="F8FAFC"/>
-                </a:solidFill>
-              </a:defRPr>
-            </a:pPr>
-            <a:r>
-              <a:t>🛡️ Zero Cold DMs   •   ⚡ 1-Click ATS Referrals   •   🚀 Micro-Bounties   •   🏫 NIRF/NAAC Telemetry</a:t>
-            </a:r>
-          </a:p>
-        </p:txBody>
-      </p:sp>
-    </p:spTree>
-  </p:cSld>
-  <p:clrMapOvr>
-    <a:masterClrMapping/>
-  </p:clrMapOvr>
-</p:sld>
-</file>
-
-<file path=ppt/slides/slide10.xml><?xml version="1.0" encoding="utf-8"?>
-<p:sld xmlns:a="http://schemas.openxmlformats.org/drawingml/2006/main" xmlns:p="http://schemas.openxmlformats.org/presentationml/2006/main" xmlns:r="http://schemas.openxmlformats.org/officeDocument/2006/relationships">
-  <p:cSld>
-    <p:spTree>
-      <p:nvGrpSpPr>
-        <p:cNvPr id="1" name=""/>
-        <p:cNvGrpSpPr/>
-        <p:nvPr/>
-      </p:nvGrpSpPr>
-      <p:grpSpPr/>
-      <p:sp>
-        <p:nvSpPr>
-          <p:cNvPr id="2" name="Rectangle 1"/>
-          <p:cNvSpPr/>
-          <p:nvPr/>
-        </p:nvSpPr>
-        <p:spPr>
-          <a:xfrm>
-            <a:off x="0" y="0"/>
-            <a:ext cx="12191695" cy="6858000"/>
+              <a:defRPr sz="1800" b="1">
+                <a:solidFill>
+                  <a:srgbClr val="C084FC"/>
+                </a:solidFill>
+              </a:defRPr>
+            </a:pPr>
+            <a:r>
+              <a:t>“BUILDING A LIVING NETWORK, NOT A DEAD DIRECTORY.”</a:t>
+            </a:r>
+          </a:p>
+          <a:p>
+            <a:pPr algn="ctr">
+              <a:defRPr sz="1200">
+                <a:solidFill>
+                  <a:srgbClr val="94A3B8"/>
+                </a:solidFill>
+              </a:defRPr>
+            </a:pPr>
+            <a:r>
+              <a:t>Not just who you know, but who can help you grow — through verified Proof-of-Work &amp; 1-Click Referrals.</a:t>
+            </a:r>
+          </a:p>
+        </p:txBody>
+      </p:sp>
+      <p:sp>
+        <p:nvSpPr>
+          <p:cNvPr id="8" name="TextBox 7"/>
+          <p:cNvSpPr txBox="1"/>
+          <p:nvPr/>
+        </p:nvSpPr>
+        <p:spPr>
+          <a:xfrm>
+            <a:off x="1371600" y="4297680"/>
+            <a:ext cx="9448495" cy="1097280"/>
           </a:xfrm>
           <a:prstGeom prst="rect">
             <a:avLst/>
           </a:prstGeom>
-          <a:solidFill>
-            <a:srgbClr val="040712"/>
-          </a:solidFill>
-          <a:ln>
-            <a:solidFill>
-              <a:srgbClr val="040712"/>
-            </a:solidFill>
-          </a:ln>
-        </p:spPr>
-        <p:style>
-          <a:lnRef idx="1">
-            <a:schemeClr val="accent1"/>
-          </a:lnRef>
-          <a:fillRef idx="3">
-            <a:schemeClr val="accent1"/>
-          </a:fillRef>
-          <a:effectRef idx="2">
-            <a:schemeClr val="accent1"/>
-          </a:effectRef>
-          <a:fontRef idx="minor">
-            <a:schemeClr val="lt1"/>
-          </a:fontRef>
-        </p:style>
-        <p:txBody>
-          <a:bodyPr rtlCol="0" anchor="ctr"/>
-          <a:lstStyle/>
-          <a:p>
-            <a:pPr algn="ctr"/>
-          </a:p>
-        </p:txBody>
-      </p:sp>
-      <p:sp>
-        <p:nvSpPr>
-          <p:cNvPr id="3" name="Rounded Rectangle 2"/>
-          <p:cNvSpPr/>
-          <p:nvPr/>
-        </p:nvSpPr>
-        <p:spPr>
-          <a:xfrm>
-            <a:off x="1371600" y="1097280"/>
-            <a:ext cx="9448495" cy="4663440"/>
-          </a:xfrm>
-          <a:prstGeom prst="roundRect">
-            <a:avLst/>
-          </a:prstGeom>
-          <a:solidFill>
-            <a:srgbClr val="0C1326"/>
-          </a:solidFill>
-          <a:ln w="19050">
-            <a:solidFill>
-              <a:srgbClr val="F472B6"/>
-            </a:solidFill>
-          </a:ln>
-        </p:spPr>
-        <p:style>
-          <a:lnRef idx="1">
-            <a:schemeClr val="accent1"/>
-          </a:lnRef>
-          <a:fillRef idx="3">
-            <a:schemeClr val="accent1"/>
-          </a:fillRef>
-          <a:effectRef idx="2">
-            <a:schemeClr val="accent1"/>
-          </a:effectRef>
-          <a:fontRef idx="minor">
-            <a:schemeClr val="lt1"/>
-          </a:fontRef>
-        </p:style>
-        <p:txBody>
-          <a:bodyPr rtlCol="0" anchor="ctr"/>
-          <a:lstStyle/>
-          <a:p>
-            <a:pPr algn="ctr"/>
-          </a:p>
-        </p:txBody>
-      </p:sp>
-      <p:sp>
-        <p:nvSpPr>
-          <p:cNvPr id="4" name="TextBox 3"/>
-          <p:cNvSpPr txBox="1"/>
-          <p:nvPr/>
-        </p:nvSpPr>
-        <p:spPr>
-          <a:xfrm>
-            <a:off x="1828800" y="1463040"/>
-            <a:ext cx="8534095" cy="3931920"/>
-          </a:xfrm>
-          <a:prstGeom prst="rect">
-            <a:avLst/>
-          </a:prstGeom>
           <a:noFill/>
         </p:spPr>
         <p:txBody>
-          <a:bodyPr wrap="square">
+          <a:bodyPr wrap="none">
             <a:spAutoFit/>
           </a:bodyPr>
           <a:lstStyle/>
           <a:p>
             <a:pPr algn="ctr">
-              <a:defRPr sz="1100" b="1">
-                <a:solidFill>
-                  <a:srgbClr val="F472B6"/>
-                </a:solidFill>
-              </a:defRPr>
-            </a:pPr>
-            <a:r>
-              <a:t>THE WINNING CONCLUSION</a:t>
-            </a:r>
-          </a:p>
-          <a:p>
-            <a:pPr algn="ctr">
-              <a:defRPr sz="2800" b="1">
+              <a:defRPr sz="1000" b="1">
                 <a:solidFill>
                   <a:srgbClr val="F8FAFC"/>
                 </a:solidFill>
               </a:defRPr>
             </a:pPr>
             <a:r>
-              <a:t>LinkX Turns Dead Directories Into Living Economies.</a:t>
-            </a:r>
-          </a:p>
-          <a:p>
-            <a:pPr algn="ctr">
-              <a:defRPr sz="1400">
-                <a:solidFill>
-                  <a:srgbClr val="94A3B8"/>
-                </a:solidFill>
-              </a:defRPr>
-            </a:pPr>
-            <a:br/>
-            <a:r>
-              <a:t>• Traditional directories fail because they lack mutual intent &amp; proof-of-work.</a:t>
-            </a:r>
-            <a:br/>
-            <a:r>
-              <a:t>• LinkX protects alumni time with 1-minute dossiers &amp; 1-click ATS referrals.</a:t>
-            </a:r>
-            <a:br/>
-            <a:r>
-              <a:t>• Students earn stipends &amp; job offers on merit, not begging DMs.</a:t>
-            </a:r>
-            <a:br/>
-            <a:r>
-              <a:t>• Institutions gain actionable, audit-ready data for accreditation.</a:t>
+              <a:t>PROJECT TEAM MEMBERS:</a:t>
             </a:r>
           </a:p>
           <a:p>
             <a:pPr algn="ctr">
               <a:defRPr sz="1400" b="1">
                 <a:solidFill>
-                  <a:srgbClr val="38BDF8"/>
-                </a:solidFill>
-              </a:defRPr>
-            </a:pPr>
-            <a:br/>
-            <a:r>
-              <a:t>🚀 Live Engine Running at http://localhost:3000 • Ready for Q&amp;A</a:t>
+                  <a:srgbClr val="F472B6"/>
+                </a:solidFill>
+              </a:defRPr>
+            </a:pPr>
+            <a:r>
+              <a:t>[ Dhani Varshney   •   Dipika Mourya   •   Ansh Kumar   •   Harsh Pal ]</a:t>
+            </a:r>
+          </a:p>
+          <a:p>
+            <a:pPr algn="ctr">
+              <a:defRPr sz="1000">
+                <a:solidFill>
+                  <a:srgbClr val="94A3B8"/>
+                </a:solidFill>
+              </a:defRPr>
+            </a:pPr>
+            <a:r>
+              <a:t>🧠 AI / AST Code Intelligence   |   ⚡ Full Stack Node.js &amp; Modern Web Architecture</a:t>
             </a:r>
           </a:p>
         </p:txBody>
@@ -3572,11 +3435,11 @@
             <a:avLst/>
           </a:prstGeom>
           <a:solidFill>
-            <a:srgbClr val="040712"/>
+            <a:srgbClr val="030611"/>
           </a:solidFill>
           <a:ln>
             <a:solidFill>
-              <a:srgbClr val="040712"/>
+              <a:srgbClr val="030611"/>
             </a:solidFill>
           </a:ln>
         </p:spPr>
@@ -3611,7 +3474,7 @@
         <p:spPr>
           <a:xfrm>
             <a:off x="731520" y="365760"/>
-            <a:ext cx="10698480" cy="365760"/>
+            <a:ext cx="10728655" cy="320040"/>
           </a:xfrm>
           <a:prstGeom prst="rect">
             <a:avLst/>
@@ -3619,20 +3482,20 @@
           <a:noFill/>
         </p:spPr>
         <p:txBody>
-          <a:bodyPr wrap="square">
+          <a:bodyPr wrap="none">
             <a:spAutoFit/>
           </a:bodyPr>
           <a:lstStyle/>
           <a:p>
             <a:pPr>
-              <a:defRPr sz="900" b="1">
+              <a:defRPr sz="1000" b="1">
                 <a:solidFill>
                   <a:srgbClr val="F472B6"/>
                 </a:solidFill>
               </a:defRPr>
             </a:pPr>
             <a:r>
-              <a:t>THE CORE DILEMMA</a:t>
+              <a:t>THE CHALLENGE   •   02 / 07</a:t>
             </a:r>
           </a:p>
         </p:txBody>
@@ -3645,8 +3508,8 @@
         </p:nvSpPr>
         <p:spPr>
           <a:xfrm>
-            <a:off x="731520" y="685800"/>
-            <a:ext cx="10698480" cy="731520"/>
+            <a:off x="731520" y="658368"/>
+            <a:ext cx="10728655" cy="594360"/>
           </a:xfrm>
           <a:prstGeom prst="rect">
             <a:avLst/>
@@ -3654,20 +3517,20 @@
           <a:noFill/>
         </p:spPr>
         <p:txBody>
-          <a:bodyPr wrap="square">
+          <a:bodyPr wrap="none">
             <a:spAutoFit/>
           </a:bodyPr>
           <a:lstStyle/>
           <a:p>
             <a:pPr>
-              <a:defRPr sz="2400" b="1">
+              <a:defRPr sz="2200" b="1">
                 <a:solidFill>
                   <a:srgbClr val="F8FAFC"/>
                 </a:solidFill>
               </a:defRPr>
             </a:pPr>
             <a:r>
-              <a:t>Why Traditional Alumni Portals &amp; Cold DMs Fail</a:t>
+              <a:t>Finding the right mentor takes more than a dead directory.</a:t>
             </a:r>
           </a:p>
         </p:txBody>
@@ -3680,8 +3543,8 @@
         </p:nvSpPr>
         <p:spPr>
           <a:xfrm>
-            <a:off x="731520" y="1325880"/>
-            <a:ext cx="10698480" cy="365760"/>
+            <a:off x="731520" y="1234440"/>
+            <a:ext cx="10728655" cy="411480"/>
           </a:xfrm>
           <a:prstGeom prst="rect">
             <a:avLst/>
@@ -3689,20 +3552,20 @@
           <a:noFill/>
         </p:spPr>
         <p:txBody>
-          <a:bodyPr wrap="square">
+          <a:bodyPr wrap="none">
             <a:spAutoFit/>
           </a:bodyPr>
           <a:lstStyle/>
           <a:p>
             <a:pPr>
-              <a:defRPr sz="1200">
+              <a:defRPr sz="1150">
                 <a:solidFill>
                   <a:srgbClr val="94A3B8"/>
                 </a:solidFill>
               </a:defRPr>
             </a:pPr>
             <a:r>
-              <a:t>Traditional college portals with 10,000+ registered names have nearly ZERO daily active users.</a:t>
+              <a:t>Traditional alumni portals with 10,000+ names fail because they lack relevance, mutual intent, and proof.</a:t>
             </a:r>
           </a:p>
         </p:txBody>
@@ -3715,18 +3578,18 @@
         </p:nvSpPr>
         <p:spPr>
           <a:xfrm>
-            <a:off x="731520" y="2011680"/>
-            <a:ext cx="3429000" cy="4023360"/>
+            <a:off x="731520" y="1920240"/>
+            <a:ext cx="3429000" cy="4114800"/>
           </a:xfrm>
           <a:prstGeom prst="roundRect">
             <a:avLst/>
           </a:prstGeom>
           <a:solidFill>
-            <a:srgbClr val="0C1326"/>
+            <a:srgbClr val="0A1024"/>
           </a:solidFill>
-          <a:ln w="12700">
+          <a:ln w="15240">
             <a:solidFill>
-              <a:srgbClr val="F472B6"/>
+              <a:srgbClr val="38BDF8"/>
             </a:solidFill>
           </a:ln>
         </p:spPr>
@@ -3760,8 +3623,8 @@
         </p:nvSpPr>
         <p:spPr>
           <a:xfrm>
-            <a:off x="914400" y="2194560"/>
-            <a:ext cx="3063240" cy="3657600"/>
+            <a:off x="914400" y="2103120"/>
+            <a:ext cx="3063240" cy="3749039"/>
           </a:xfrm>
           <a:prstGeom prst="rect">
             <a:avLst/>
@@ -3775,39 +3638,39 @@
           <a:lstStyle/>
           <a:p>
             <a:pPr>
-              <a:defRPr sz="1600" b="1">
+              <a:defRPr sz="2800" b="1">
+                <a:solidFill>
+                  <a:srgbClr val="38BDF8"/>
+                </a:solidFill>
+              </a:defRPr>
+            </a:pPr>
+            <a:r>
+              <a:t>01</a:t>
+            </a:r>
+          </a:p>
+          <a:p>
+            <a:pPr>
+              <a:defRPr sz="1500" b="1">
                 <a:solidFill>
                   <a:srgbClr val="F8FAFC"/>
                 </a:solidFill>
               </a:defRPr>
             </a:pPr>
             <a:r>
-              <a:t>The Cold-DM Crisis</a:t>
-            </a:r>
-          </a:p>
-          <a:p>
-            <a:pPr>
-              <a:defRPr sz="1100" b="1">
-                <a:solidFill>
-                  <a:srgbClr val="F472B6"/>
-                </a:solidFill>
-              </a:defRPr>
-            </a:pPr>
-            <a:r>
-              <a:t>98% Message Drop Rate</a:t>
+              <a:t>The Relevance &amp; Conviction Gap</a:t>
             </a:r>
           </a:p>
           <a:p>
             <a:br/>
             <a:pPr>
-              <a:defRPr sz="1200">
+              <a:defRPr sz="1150">
                 <a:solidFill>
                   <a:srgbClr val="94A3B8"/>
                 </a:solidFill>
               </a:defRPr>
             </a:pPr>
             <a:r>
-              <a:t>Students spam alumni on LinkedIn with generic begging messages ('Sir please refer me'). Busy engineers at Google &amp; Swiggy have 0 time to read 5-page resumes, leading them to close their inboxes completely.</a:t>
+              <a:t>A broad list of alumni names rarely makes it obvious who is actively open to mentoring, hiring, or referring. Students don't know who has the intent to help, resulting in arbitrary outreach.</a:t>
             </a:r>
           </a:p>
         </p:txBody>
@@ -3820,18 +3683,18 @@
         </p:nvSpPr>
         <p:spPr>
           <a:xfrm>
-            <a:off x="4343400" y="2011680"/>
-            <a:ext cx="3429000" cy="4023360"/>
+            <a:off x="4343400" y="1920240"/>
+            <a:ext cx="3429000" cy="4114800"/>
           </a:xfrm>
           <a:prstGeom prst="roundRect">
             <a:avLst/>
           </a:prstGeom>
           <a:solidFill>
-            <a:srgbClr val="0C1326"/>
+            <a:srgbClr val="0A1024"/>
           </a:solidFill>
-          <a:ln w="12700">
+          <a:ln w="15240">
             <a:solidFill>
-              <a:srgbClr val="38BDF8"/>
+              <a:srgbClr val="C084FC"/>
             </a:solidFill>
           </a:ln>
         </p:spPr>
@@ -3865,8 +3728,8 @@
         </p:nvSpPr>
         <p:spPr>
           <a:xfrm>
-            <a:off x="4526280" y="2194560"/>
-            <a:ext cx="3063240" cy="3657600"/>
+            <a:off x="4526280" y="2103120"/>
+            <a:ext cx="3063240" cy="3749039"/>
           </a:xfrm>
           <a:prstGeom prst="rect">
             <a:avLst/>
@@ -3880,39 +3743,39 @@
           <a:lstStyle/>
           <a:p>
             <a:pPr>
-              <a:defRPr sz="1600" b="1">
+              <a:defRPr sz="2800" b="1">
+                <a:solidFill>
+                  <a:srgbClr val="C084FC"/>
+                </a:solidFill>
+              </a:defRPr>
+            </a:pPr>
+            <a:r>
+              <a:t>02</a:t>
+            </a:r>
+          </a:p>
+          <a:p>
+            <a:pPr>
+              <a:defRPr sz="1500" b="1">
                 <a:solidFill>
                   <a:srgbClr val="F8FAFC"/>
                 </a:solidFill>
               </a:defRPr>
             </a:pPr>
             <a:r>
-              <a:t>Directory vs Network</a:t>
-            </a:r>
-          </a:p>
-          <a:p>
-            <a:pPr>
-              <a:defRPr sz="1100" b="1">
-                <a:solidFill>
-                  <a:srgbClr val="38BDF8"/>
-                </a:solidFill>
-              </a:defRPr>
-            </a:pPr>
-            <a:r>
-              <a:t>Dead Phonebook Syndrome</a:t>
+              <a:t>Time-Consuming Manual Search</a:t>
             </a:r>
           </a:p>
           <a:p>
             <a:br/>
             <a:pPr>
-              <a:defRPr sz="1200">
+              <a:defRPr sz="1150">
                 <a:solidFill>
                   <a:srgbClr val="94A3B8"/>
                 </a:solidFill>
               </a:defRPr>
             </a:pPr>
             <a:r>
-              <a:t>A directory lists where people work; a NETWORK actively pairs people based on real-time Intent and Expertise. Existing portals have no concept of mutual availability or reciprocation triggers.</a:t>
+              <a:t>Students spend hours browsing hundreds of stale LinkedIn profiles, comparing roles and companies manually without knowing whether the alumnus actually works in their target stack.</a:t>
             </a:r>
           </a:p>
         </p:txBody>
@@ -3925,18 +3788,18 @@
         </p:nvSpPr>
         <p:spPr>
           <a:xfrm>
-            <a:off x="7955280" y="2011680"/>
-            <a:ext cx="3429000" cy="4023360"/>
+            <a:off x="7955280" y="1920240"/>
+            <a:ext cx="3429000" cy="4114800"/>
           </a:xfrm>
           <a:prstGeom prst="roundRect">
             <a:avLst/>
           </a:prstGeom>
           <a:solidFill>
-            <a:srgbClr val="0C1326"/>
+            <a:srgbClr val="0A1024"/>
           </a:solidFill>
-          <a:ln w="12700">
+          <a:ln w="15240">
             <a:solidFill>
-              <a:srgbClr val="C084FC"/>
+              <a:srgbClr val="F472B6"/>
             </a:solidFill>
           </a:ln>
         </p:spPr>
@@ -3970,8 +3833,8 @@
         </p:nvSpPr>
         <p:spPr>
           <a:xfrm>
-            <a:off x="8138160" y="2194560"/>
-            <a:ext cx="3063240" cy="3657600"/>
+            <a:off x="8138160" y="2103120"/>
+            <a:ext cx="3063240" cy="3749039"/>
           </a:xfrm>
           <a:prstGeom prst="rect">
             <a:avLst/>
@@ -3985,39 +3848,39 @@
           <a:lstStyle/>
           <a:p>
             <a:pPr>
-              <a:defRPr sz="1600" b="1">
+              <a:defRPr sz="2800" b="1">
+                <a:solidFill>
+                  <a:srgbClr val="F472B6"/>
+                </a:solidFill>
+              </a:defRPr>
+            </a:pPr>
+            <a:r>
+              <a:t>03</a:t>
+            </a:r>
+          </a:p>
+          <a:p>
+            <a:pPr>
+              <a:defRPr sz="1500" b="1">
                 <a:solidFill>
                   <a:srgbClr val="F8FAFC"/>
                 </a:solidFill>
               </a:defRPr>
             </a:pPr>
             <a:r>
-              <a:t>Disconnected Stakeholders</a:t>
-            </a:r>
-          </a:p>
-          <a:p>
-            <a:pPr>
-              <a:defRPr sz="1100" b="1">
-                <a:solidFill>
-                  <a:srgbClr val="C084FC"/>
-                </a:solidFill>
-              </a:defRPr>
-            </a:pPr>
-            <a:r>
-              <a:t>Siloed Campus Ecosystem</a:t>
+              <a:t>Outreach Hesitation &amp; Cold-DM Spam</a:t>
             </a:r>
           </a:p>
           <a:p>
             <a:br/>
             <a:pPr>
-              <a:defRPr sz="1200">
+              <a:defRPr sz="1150">
                 <a:solidFill>
                   <a:srgbClr val="94A3B8"/>
                 </a:solidFill>
               </a:defRPr>
             </a:pPr>
             <a:r>
-              <a:t>Alumni founders struggle to find fast campus builders for MVPs; faculty lack industry co-guides for student capstones; and colleges have zero live data on referral-to-offer conversions.</a:t>
+              <a:t>Students are unsure how to start a thoughtful message and default to generic begging ('Sir please refer me'). Busy engineers at Google/Swiggy ignore 98% of cold DMs and close their inboxes.</a:t>
             </a:r>
           </a:p>
         </p:txBody>
@@ -4055,11 +3918,11 @@
             <a:avLst/>
           </a:prstGeom>
           <a:solidFill>
-            <a:srgbClr val="040712"/>
+            <a:srgbClr val="030611"/>
           </a:solidFill>
           <a:ln>
             <a:solidFill>
-              <a:srgbClr val="040712"/>
+              <a:srgbClr val="030611"/>
             </a:solidFill>
           </a:ln>
         </p:spPr>
@@ -4094,7 +3957,7 @@
         <p:spPr>
           <a:xfrm>
             <a:off x="731520" y="365760"/>
-            <a:ext cx="10698480" cy="365760"/>
+            <a:ext cx="10728655" cy="320040"/>
           </a:xfrm>
           <a:prstGeom prst="rect">
             <a:avLst/>
@@ -4102,20 +3965,20 @@
           <a:noFill/>
         </p:spPr>
         <p:txBody>
-          <a:bodyPr wrap="square">
+          <a:bodyPr wrap="none">
             <a:spAutoFit/>
           </a:bodyPr>
           <a:lstStyle/>
           <a:p>
             <a:pPr>
-              <a:defRPr sz="900" b="1">
+              <a:defRPr sz="1000" b="1">
                 <a:solidFill>
                   <a:srgbClr val="F472B6"/>
                 </a:solidFill>
               </a:defRPr>
             </a:pPr>
             <a:r>
-              <a:t>THE PARADIGM SHIFT</a:t>
+              <a:t>SMART WORKFLOW   •   03 / 07</a:t>
             </a:r>
           </a:p>
         </p:txBody>
@@ -4128,8 +3991,8 @@
         </p:nvSpPr>
         <p:spPr>
           <a:xfrm>
-            <a:off x="731520" y="685800"/>
-            <a:ext cx="10698480" cy="731520"/>
+            <a:off x="731520" y="658368"/>
+            <a:ext cx="10728655" cy="594360"/>
           </a:xfrm>
           <a:prstGeom prst="rect">
             <a:avLst/>
@@ -4137,20 +4000,20 @@
           <a:noFill/>
         </p:spPr>
         <p:txBody>
-          <a:bodyPr wrap="square">
+          <a:bodyPr wrap="none">
             <a:spAutoFit/>
           </a:bodyPr>
           <a:lstStyle/>
           <a:p>
             <a:pPr>
-              <a:defRPr sz="2400" b="1">
+              <a:defRPr sz="2200" b="1">
                 <a:solidFill>
                   <a:srgbClr val="F8FAFC"/>
                 </a:solidFill>
               </a:defRPr>
             </a:pPr>
             <a:r>
-              <a:t>The LinkX Solution: 6-Role Reciprocity Engine</a:t>
+              <a:t>Our Solution: LinkX Reciprocity Pipeline</a:t>
             </a:r>
           </a:p>
         </p:txBody>
@@ -4163,8 +4026,8 @@
         </p:nvSpPr>
         <p:spPr>
           <a:xfrm>
-            <a:off x="731520" y="1325880"/>
-            <a:ext cx="10698480" cy="365760"/>
+            <a:off x="731520" y="1234440"/>
+            <a:ext cx="10728655" cy="411480"/>
           </a:xfrm>
           <a:prstGeom prst="rect">
             <a:avLst/>
@@ -4172,20 +4035,20 @@
           <a:noFill/>
         </p:spPr>
         <p:txBody>
-          <a:bodyPr wrap="square">
+          <a:bodyPr wrap="none">
             <a:spAutoFit/>
           </a:bodyPr>
           <a:lstStyle/>
           <a:p>
             <a:pPr>
-              <a:defRPr sz="1200">
+              <a:defRPr sz="1150">
                 <a:solidFill>
                   <a:srgbClr val="94A3B8"/>
                 </a:solidFill>
               </a:defRPr>
             </a:pPr>
             <a:r>
-              <a:t>An autonomous intent exchange connecting all 6 campus stakeholders with high-conviction proof-of-work.</a:t>
+              <a:t>From natural-language career goals to verified proof-of-work and 1-click ATS referrals.</a:t>
             </a:r>
           </a:p>
         </p:txBody>
@@ -4198,18 +4061,18 @@
         </p:nvSpPr>
         <p:spPr>
           <a:xfrm>
-            <a:off x="731520" y="1920240"/>
-            <a:ext cx="3429000" cy="1965960"/>
+            <a:off x="731520" y="1874519"/>
+            <a:ext cx="2542032" cy="2286000"/>
           </a:xfrm>
           <a:prstGeom prst="roundRect">
             <a:avLst/>
           </a:prstGeom>
           <a:solidFill>
-            <a:srgbClr val="0C1326"/>
+            <a:srgbClr val="0A1024"/>
           </a:solidFill>
-          <a:ln>
+          <a:ln w="12700">
             <a:solidFill>
-              <a:srgbClr val="1E293B"/>
+              <a:srgbClr val="38BDF8"/>
             </a:solidFill>
           </a:ln>
         </p:spPr>
@@ -4243,8 +4106,8 @@
         </p:nvSpPr>
         <p:spPr>
           <a:xfrm>
-            <a:off x="868680" y="2057400"/>
-            <a:ext cx="3154680" cy="1691640"/>
+            <a:off x="868680" y="1965960"/>
+            <a:ext cx="2267712" cy="2103120"/>
           </a:xfrm>
           <a:prstGeom prst="rect">
             <a:avLst/>
@@ -4265,31 +4128,20 @@
               </a:defRPr>
             </a:pPr>
             <a:r>
-              <a:t>🎓 Student Gateway</a:t>
-            </a:r>
-          </a:p>
-          <a:p>
-            <a:pPr>
-              <a:defRPr sz="1000" b="1">
-                <a:solidFill>
-                  <a:srgbClr val="F8FAFC"/>
-                </a:solidFill>
-              </a:defRPr>
-            </a:pPr>
-            <a:r>
-              <a:t>Proof-of-Work Pitch Lab</a:t>
-            </a:r>
-          </a:p>
-          <a:p>
-            <a:pPr>
-              <a:defRPr sz="1100">
+              <a:t>1. Understand Intent</a:t>
+            </a:r>
+          </a:p>
+          <a:p>
+            <a:br/>
+            <a:pPr>
+              <a:defRPr sz="1050">
                 <a:solidFill>
                   <a:srgbClr val="94A3B8"/>
                 </a:solidFill>
               </a:defRPr>
             </a:pPr>
             <a:r>
-              <a:t>No raw text allowed. Connects GitHub repo/PR; generates automated Code Readiness Score (0-100).</a:t>
+              <a:t>Students describe career goals in natural language or specify target engineering challenges (not just keyword search).</a:t>
             </a:r>
           </a:p>
         </p:txBody>
@@ -4302,18 +4154,18 @@
         </p:nvSpPr>
         <p:spPr>
           <a:xfrm>
-            <a:off x="4343400" y="1920240"/>
-            <a:ext cx="3429000" cy="1965960"/>
+            <a:off x="3429000" y="1874519"/>
+            <a:ext cx="2542032" cy="2286000"/>
           </a:xfrm>
           <a:prstGeom prst="roundRect">
             <a:avLst/>
           </a:prstGeom>
           <a:solidFill>
-            <a:srgbClr val="0C1326"/>
+            <a:srgbClr val="0A1024"/>
           </a:solidFill>
-          <a:ln>
+          <a:ln w="12700">
             <a:solidFill>
-              <a:srgbClr val="1E293B"/>
+              <a:srgbClr val="C084FC"/>
             </a:solidFill>
           </a:ln>
         </p:spPr>
@@ -4347,8 +4199,8 @@
         </p:nvSpPr>
         <p:spPr>
           <a:xfrm>
-            <a:off x="4480560" y="2057400"/>
-            <a:ext cx="3154680" cy="1691640"/>
+            <a:off x="3566160" y="1965960"/>
+            <a:ext cx="2267712" cy="2103120"/>
           </a:xfrm>
           <a:prstGeom prst="rect">
             <a:avLst/>
@@ -4364,36 +4216,25 @@
             <a:pPr>
               <a:defRPr sz="1400" b="1">
                 <a:solidFill>
-                  <a:srgbClr val="F472B6"/>
-                </a:solidFill>
-              </a:defRPr>
-            </a:pPr>
-            <a:r>
-              <a:t>💼 Alumnus Desk</a:t>
-            </a:r>
-          </a:p>
-          <a:p>
-            <a:pPr>
-              <a:defRPr sz="1000" b="1">
-                <a:solidFill>
-                  <a:srgbClr val="F8FAFC"/>
-                </a:solidFill>
-              </a:defRPr>
-            </a:pPr>
-            <a:r>
-              <a:t>1-Minute Decision Radar</a:t>
-            </a:r>
-          </a:p>
-          <a:p>
-            <a:pPr>
-              <a:defRPr sz="1100">
+                  <a:srgbClr val="C084FC"/>
+                </a:solidFill>
+              </a:defRPr>
+            </a:pPr>
+            <a:r>
+              <a:t>2. Semantic Matching</a:t>
+            </a:r>
+          </a:p>
+          <a:p>
+            <a:br/>
+            <a:pPr>
+              <a:defRPr sz="1050">
                 <a:solidFill>
                   <a:srgbClr val="94A3B8"/>
                 </a:solidFill>
               </a:defRPr>
             </a:pPr>
             <a:r>
-              <a:t>Receives executive code dossiers; approves 1-Click ATS referrals without resume screening fatigue.</a:t>
+              <a:t>Compares intent with alumni expertise, company hiring slots, target stack, and past mentoring track record.</a:t>
             </a:r>
           </a:p>
         </p:txBody>
@@ -4406,18 +4247,18 @@
         </p:nvSpPr>
         <p:spPr>
           <a:xfrm>
-            <a:off x="7955280" y="1920240"/>
-            <a:ext cx="3429000" cy="1965960"/>
+            <a:off x="6126480" y="1874519"/>
+            <a:ext cx="2542032" cy="2286000"/>
           </a:xfrm>
           <a:prstGeom prst="roundRect">
             <a:avLst/>
           </a:prstGeom>
           <a:solidFill>
-            <a:srgbClr val="0C1326"/>
+            <a:srgbClr val="0A1024"/>
           </a:solidFill>
-          <a:ln>
+          <a:ln w="12700">
             <a:solidFill>
-              <a:srgbClr val="1E293B"/>
+              <a:srgbClr val="F472B6"/>
             </a:solidFill>
           </a:ln>
         </p:spPr>
@@ -4451,8 +4292,8 @@
         </p:nvSpPr>
         <p:spPr>
           <a:xfrm>
-            <a:off x="8092440" y="2057400"/>
-            <a:ext cx="3154680" cy="1691640"/>
+            <a:off x="6263640" y="1965960"/>
+            <a:ext cx="2267712" cy="2103120"/>
           </a:xfrm>
           <a:prstGeom prst="rect">
             <a:avLst/>
@@ -4468,36 +4309,25 @@
             <a:pPr>
               <a:defRPr sz="1400" b="1">
                 <a:solidFill>
-                  <a:srgbClr val="C084FC"/>
-                </a:solidFill>
-              </a:defRPr>
-            </a:pPr>
-            <a:r>
-              <a:t>🚀 Founder Exchange</a:t>
-            </a:r>
-          </a:p>
-          <a:p>
-            <a:pPr>
-              <a:defRPr sz="1000" b="1">
-                <a:solidFill>
-                  <a:srgbClr val="F8FAFC"/>
-                </a:solidFill>
-              </a:defRPr>
-            </a:pPr>
-            <a:r>
-              <a:t>Micro-Bounty Board</a:t>
-            </a:r>
-          </a:p>
-          <a:p>
-            <a:pPr>
-              <a:defRPr sz="1100">
+                  <a:srgbClr val="F472B6"/>
+                </a:solidFill>
+              </a:defRPr>
+            </a:pPr>
+            <a:r>
+              <a:t>3. AST Proof-of-Work</a:t>
+            </a:r>
+          </a:p>
+          <a:p>
+            <a:br/>
+            <a:pPr>
+              <a:defRPr sz="1050">
                 <a:solidFill>
                   <a:srgbClr val="94A3B8"/>
                 </a:solidFill>
               </a:defRPr>
             </a:pPr>
             <a:r>
-              <a:t>Posts ₹5k–₹25k feature bounties with escrow protection. Hires proven campus builders in hours.</a:t>
+              <a:t>Student attaches GitHub repo/PR. Engine verifies Code Readiness (94/100), Unit Tests (92%), and P99 Latency (14ms).</a:t>
             </a:r>
           </a:p>
         </p:txBody>
@@ -4510,18 +4340,18 @@
         </p:nvSpPr>
         <p:spPr>
           <a:xfrm>
-            <a:off x="731520" y="4114800"/>
-            <a:ext cx="3429000" cy="1965960"/>
+            <a:off x="8823960" y="1874519"/>
+            <a:ext cx="2542032" cy="2286000"/>
           </a:xfrm>
           <a:prstGeom prst="roundRect">
             <a:avLst/>
           </a:prstGeom>
           <a:solidFill>
-            <a:srgbClr val="0C1326"/>
+            <a:srgbClr val="0A1024"/>
           </a:solidFill>
-          <a:ln>
+          <a:ln w="12700">
             <a:solidFill>
-              <a:srgbClr val="1E293B"/>
+              <a:srgbClr val="34D399"/>
             </a:solidFill>
           </a:ln>
         </p:spPr>
@@ -4555,8 +4385,8 @@
         </p:nvSpPr>
         <p:spPr>
           <a:xfrm>
-            <a:off x="868680" y="4251960"/>
-            <a:ext cx="3154680" cy="1691640"/>
+            <a:off x="8961120" y="1965960"/>
+            <a:ext cx="2267712" cy="2103120"/>
           </a:xfrm>
           <a:prstGeom prst="rect">
             <a:avLst/>
@@ -4572,36 +4402,25 @@
             <a:pPr>
               <a:defRPr sz="1400" b="1">
                 <a:solidFill>
-                  <a:srgbClr val="38BDF8"/>
-                </a:solidFill>
-              </a:defRPr>
-            </a:pPr>
-            <a:r>
-              <a:t>🏛️ Faculty Hub</a:t>
-            </a:r>
-          </a:p>
-          <a:p>
-            <a:pPr>
-              <a:defRPr sz="1000" b="1">
-                <a:solidFill>
-                  <a:srgbClr val="F8FAFC"/>
-                </a:solidFill>
-              </a:defRPr>
-            </a:pPr>
-            <a:r>
-              <a:t>Industry Capstones</a:t>
-            </a:r>
-          </a:p>
-          <a:p>
-            <a:pPr>
-              <a:defRPr sz="1100">
+                  <a:srgbClr val="34D399"/>
+                </a:solidFill>
+              </a:defRPr>
+            </a:pPr>
+            <a:r>
+              <a:t>4. 1-Minute Dossier</a:t>
+            </a:r>
+          </a:p>
+          <a:p>
+            <a:br/>
+            <a:pPr>
+              <a:defRPr sz="1050">
                 <a:solidFill>
                   <a:srgbClr val="94A3B8"/>
                 </a:solidFill>
               </a:defRPr>
             </a:pPr>
             <a:r>
-              <a:t>Connects semester research projects with alumni tech leads from top tier firms as industry co-guides.</a:t>
+              <a:t>AI packages a 60-second executive card. Alumnus approves with 1-Click to corporate ATS or gives 2-line code feedback.</a:t>
             </a:r>
           </a:p>
         </p:txBody>
@@ -4614,18 +4433,18 @@
         </p:nvSpPr>
         <p:spPr>
           <a:xfrm>
-            <a:off x="4343400" y="4114800"/>
-            <a:ext cx="3429000" cy="1965960"/>
+            <a:off x="731520" y="4389120"/>
+            <a:ext cx="10728655" cy="1828800"/>
           </a:xfrm>
           <a:prstGeom prst="roundRect">
             <a:avLst/>
           </a:prstGeom>
           <a:solidFill>
-            <a:srgbClr val="0C1326"/>
+            <a:srgbClr val="101A36"/>
           </a:solidFill>
           <a:ln>
             <a:solidFill>
-              <a:srgbClr val="1E293B"/>
+              <a:srgbClr val="6366F1"/>
             </a:solidFill>
           </a:ln>
         </p:spPr>
@@ -4659,8 +4478,8 @@
         </p:nvSpPr>
         <p:spPr>
           <a:xfrm>
-            <a:off x="4480560" y="4251960"/>
-            <a:ext cx="3154680" cy="1691640"/>
+            <a:off x="914400" y="4480560"/>
+            <a:ext cx="10362895" cy="1645920"/>
           </a:xfrm>
           <a:prstGeom prst="rect">
             <a:avLst/>
@@ -4674,142 +4493,64 @@
           <a:lstStyle/>
           <a:p>
             <a:pPr>
-              <a:defRPr sz="1400" b="1">
+              <a:defRPr sz="1000" b="1">
                 <a:solidFill>
                   <a:srgbClr val="F472B6"/>
                 </a:solidFill>
               </a:defRPr>
             </a:pPr>
             <a:r>
-              <a:t>🎯 Corporate Recruiter</a:t>
-            </a:r>
-          </a:p>
-          <a:p>
-            <a:pPr>
-              <a:defRPr sz="1000" b="1">
+              <a:t>ILLUSTRATIVE VERIFIED WORKFLOW IN LINKX:</a:t>
+            </a:r>
+          </a:p>
+          <a:p>
+            <a:r>
+              <a:rPr b="1">
                 <a:solidFill>
                   <a:srgbClr val="F8FAFC"/>
                 </a:solidFill>
-              </a:defRPr>
-            </a:pPr>
-            <a:r>
-              <a:t>Pre-Vetted Talent Radar</a:t>
-            </a:r>
-          </a:p>
-          <a:p>
-            <a:pPr>
-              <a:defRPr sz="1100">
-                <a:solidFill>
-                  <a:srgbClr val="94A3B8"/>
-                </a:solidFill>
-              </a:defRPr>
-            </a:pPr>
-            <a:r>
-              <a:t>Bypasses campus placement lag; filters candidates by AST test coverage, latency benchmarks, and code readiness.</a:t>
-            </a:r>
-          </a:p>
-        </p:txBody>
-      </p:sp>
-      <p:sp>
-        <p:nvSpPr>
-          <p:cNvPr id="16" name="Rounded Rectangle 15"/>
-          <p:cNvSpPr/>
-          <p:nvPr/>
-        </p:nvSpPr>
-        <p:spPr>
-          <a:xfrm>
-            <a:off x="7955280" y="4114800"/>
-            <a:ext cx="3429000" cy="1965960"/>
-          </a:xfrm>
-          <a:prstGeom prst="roundRect">
-            <a:avLst/>
-          </a:prstGeom>
-          <a:solidFill>
-            <a:srgbClr val="0C1326"/>
-          </a:solidFill>
-          <a:ln>
-            <a:solidFill>
-              <a:srgbClr val="1E293B"/>
-            </a:solidFill>
-          </a:ln>
-        </p:spPr>
-        <p:style>
-          <a:lnRef idx="1">
-            <a:schemeClr val="accent1"/>
-          </a:lnRef>
-          <a:fillRef idx="3">
-            <a:schemeClr val="accent1"/>
-          </a:fillRef>
-          <a:effectRef idx="2">
-            <a:schemeClr val="accent1"/>
-          </a:effectRef>
-          <a:fontRef idx="minor">
-            <a:schemeClr val="lt1"/>
-          </a:fontRef>
-        </p:style>
-        <p:txBody>
-          <a:bodyPr rtlCol="0" anchor="ctr"/>
-          <a:lstStyle/>
-          <a:p>
-            <a:pPr algn="ctr"/>
-          </a:p>
-        </p:txBody>
-      </p:sp>
-      <p:sp>
-        <p:nvSpPr>
-          <p:cNvPr id="17" name="TextBox 16"/>
-          <p:cNvSpPr txBox="1"/>
-          <p:nvPr/>
-        </p:nvSpPr>
-        <p:spPr>
-          <a:xfrm>
-            <a:off x="8092440" y="4251960"/>
-            <a:ext cx="3154680" cy="1691640"/>
-          </a:xfrm>
-          <a:prstGeom prst="rect">
-            <a:avLst/>
-          </a:prstGeom>
-          <a:noFill/>
-        </p:spPr>
-        <p:txBody>
-          <a:bodyPr wrap="square">
-            <a:spAutoFit/>
-          </a:bodyPr>
-          <a:lstStyle/>
-          <a:p>
-            <a:pPr>
-              <a:defRPr sz="1400" b="1">
+              </a:rPr>
+              <a:t>Student Goal: </a:t>
+            </a:r>
+            <a:r>
+              <a:rPr>
+                <a:solidFill>
+                  <a:srgbClr val="38BDF8"/>
+                </a:solidFill>
+              </a:rPr>
+              <a:t>'Backend Distributed Systems internship at Swiggy'  →  </a:t>
+            </a:r>
+            <a:r>
+              <a:rPr b="1">
+                <a:solidFill>
+                  <a:srgbClr val="F8FAFC"/>
+                </a:solidFill>
+              </a:rPr>
+              <a:t>Proof Attached: </a:t>
+            </a:r>
+            <a:r>
+              <a:rPr>
                 <a:solidFill>
                   <a:srgbClr val="C084FC"/>
                 </a:solidFill>
-              </a:defRPr>
-            </a:pPr>
-            <a:r>
-              <a:t>🏫 Institution Desk</a:t>
-            </a:r>
-          </a:p>
-          <a:p>
-            <a:pPr>
-              <a:defRPr sz="1000" b="1">
+              </a:rPr>
+              <a:t>Consistent Hashing Ring in Go (94/100 Readiness)  →  </a:t>
+            </a:r>
+            <a:r>
+              <a:rPr b="1">
                 <a:solidFill>
                   <a:srgbClr val="F8FAFC"/>
                 </a:solidFill>
-              </a:defRPr>
-            </a:pPr>
-            <a:r>
-              <a:t>Outcome &amp; NIRF Analytics</a:t>
-            </a:r>
-          </a:p>
-          <a:p>
-            <a:pPr>
-              <a:defRPr sz="1100">
-                <a:solidFill>
-                  <a:srgbClr val="94A3B8"/>
-                </a:solidFill>
-              </a:defRPr>
-            </a:pPr>
-            <a:r>
-              <a:t>Real-time telemetry on student earnings, alumni density in tech hubs, and verified referral conversions.</a:t>
+              </a:rPr>
+              <a:t>Outcome: </a:t>
+            </a:r>
+            <a:r>
+              <a:rPr>
+                <a:solidFill>
+                  <a:srgbClr val="34D399"/>
+                </a:solidFill>
+              </a:rPr>
+              <a:t>Rohan Verma (Senior SDE @ Swiggy) triggers 1-Click ATS Referral!</a:t>
             </a:r>
           </a:p>
         </p:txBody>
@@ -4847,11 +4588,11 @@
             <a:avLst/>
           </a:prstGeom>
           <a:solidFill>
-            <a:srgbClr val="040712"/>
+            <a:srgbClr val="030611"/>
           </a:solidFill>
           <a:ln>
             <a:solidFill>
-              <a:srgbClr val="040712"/>
+              <a:srgbClr val="030611"/>
             </a:solidFill>
           </a:ln>
         </p:spPr>
@@ -4886,7 +4627,7 @@
         <p:spPr>
           <a:xfrm>
             <a:off x="731520" y="365760"/>
-            <a:ext cx="10698480" cy="365760"/>
+            <a:ext cx="10728655" cy="320040"/>
           </a:xfrm>
           <a:prstGeom prst="rect">
             <a:avLst/>
@@ -4894,20 +4635,20 @@
           <a:noFill/>
         </p:spPr>
         <p:txBody>
-          <a:bodyPr wrap="square">
+          <a:bodyPr wrap="none">
             <a:spAutoFit/>
           </a:bodyPr>
           <a:lstStyle/>
           <a:p>
             <a:pPr>
-              <a:defRPr sz="900" b="1">
+              <a:defRPr sz="1000" b="1">
                 <a:solidFill>
                   <a:srgbClr val="F472B6"/>
                 </a:solidFill>
               </a:defRPr>
             </a:pPr>
             <a:r>
-              <a:t>FEATURE SPOTLIGHT 1</a:t>
+              <a:t>CAPABILITIES   •   04 / 07</a:t>
             </a:r>
           </a:p>
         </p:txBody>
@@ -4920,8 +4661,8 @@
         </p:nvSpPr>
         <p:spPr>
           <a:xfrm>
-            <a:off x="731520" y="685800"/>
-            <a:ext cx="10698480" cy="731520"/>
+            <a:off x="731520" y="658368"/>
+            <a:ext cx="10728655" cy="594360"/>
           </a:xfrm>
           <a:prstGeom prst="rect">
             <a:avLst/>
@@ -4929,20 +4670,20 @@
           <a:noFill/>
         </p:spPr>
         <p:txBody>
-          <a:bodyPr wrap="square">
+          <a:bodyPr wrap="none">
             <a:spAutoFit/>
           </a:bodyPr>
           <a:lstStyle/>
           <a:p>
             <a:pPr>
-              <a:defRPr sz="2400" b="1">
+              <a:defRPr sz="2200" b="1">
                 <a:solidFill>
                   <a:srgbClr val="F8FAFC"/>
                 </a:solidFill>
               </a:defRPr>
             </a:pPr>
             <a:r>
-              <a:t>Anti-Cold-DM Pitch Lab &amp; AST Code Engine</a:t>
+              <a:t>Key Features &amp; Differentiators</a:t>
             </a:r>
           </a:p>
         </p:txBody>
@@ -4955,8 +4696,8 @@
         </p:nvSpPr>
         <p:spPr>
           <a:xfrm>
-            <a:off x="731520" y="1325880"/>
-            <a:ext cx="10698480" cy="365760"/>
+            <a:off x="731520" y="1234440"/>
+            <a:ext cx="10728655" cy="411480"/>
           </a:xfrm>
           <a:prstGeom prst="rect">
             <a:avLst/>
@@ -4964,20 +4705,20 @@
           <a:noFill/>
         </p:spPr>
         <p:txBody>
-          <a:bodyPr wrap="square">
+          <a:bodyPr wrap="none">
             <a:spAutoFit/>
           </a:bodyPr>
           <a:lstStyle/>
           <a:p>
             <a:pPr>
-              <a:defRPr sz="1200">
+              <a:defRPr sz="1150">
                 <a:solidFill>
                   <a:srgbClr val="94A3B8"/>
                 </a:solidFill>
               </a:defRPr>
             </a:pPr>
             <a:r>
-              <a:t>Replacing begging DMs with verifiable engineering proof-of-work.</a:t>
+              <a:t>A laser-focused set of capabilities engineered to turn passive connections into tangible outcomes.</a:t>
             </a:r>
           </a:p>
         </p:txBody>
@@ -4990,18 +4731,18 @@
         </p:nvSpPr>
         <p:spPr>
           <a:xfrm>
-            <a:off x="731520" y="2011680"/>
-            <a:ext cx="5212080" cy="4114800"/>
+            <a:off x="731520" y="1920240"/>
+            <a:ext cx="5257800" cy="1965960"/>
           </a:xfrm>
           <a:prstGeom prst="roundRect">
             <a:avLst/>
           </a:prstGeom>
           <a:solidFill>
-            <a:srgbClr val="0C1326"/>
+            <a:srgbClr val="0A1024"/>
           </a:solidFill>
-          <a:ln>
+          <a:ln w="12700">
             <a:solidFill>
-              <a:srgbClr val="6366F1"/>
+              <a:srgbClr val="38BDF8"/>
             </a:solidFill>
           </a:ln>
         </p:spPr>
@@ -5035,8 +4776,8 @@
         </p:nvSpPr>
         <p:spPr>
           <a:xfrm>
-            <a:off x="914400" y="2194560"/>
-            <a:ext cx="4846320" cy="3749039"/>
+            <a:off x="914400" y="2103120"/>
+            <a:ext cx="4892040" cy="1600200"/>
           </a:xfrm>
           <a:prstGeom prst="rect">
             <a:avLst/>
@@ -5050,114 +4791,27 @@
           <a:lstStyle/>
           <a:p>
             <a:pPr>
-              <a:defRPr sz="1600" b="1">
-                <a:solidFill>
-                  <a:srgbClr val="F8FAFC"/>
-                </a:solidFill>
-              </a:defRPr>
-            </a:pPr>
-            <a:r>
-              <a:t>How the Anti-Cold-DM Engine Works:</a:t>
+              <a:defRPr sz="1500" b="1">
+                <a:solidFill>
+                  <a:srgbClr val="38BDF8"/>
+                </a:solidFill>
+              </a:defRPr>
+            </a:pPr>
+            <a:r>
+              <a:t>Anti-Cold-DM Pitch Lab</a:t>
             </a:r>
           </a:p>
           <a:p>
             <a:br/>
             <a:pPr>
-              <a:defRPr sz="1200" b="1">
-                <a:solidFill>
-                  <a:srgbClr val="38BDF8"/>
-                </a:solidFill>
-              </a:defRPr>
-            </a:pPr>
-            <a:r>
-              <a:t>1. Zero Begging Messages:</a:t>
-            </a:r>
-          </a:p>
-          <a:p>
-            <a:pPr>
-              <a:defRPr sz="1100">
+              <a:defRPr sz="1150">
                 <a:solidFill>
                   <a:srgbClr val="94A3B8"/>
                 </a:solidFill>
               </a:defRPr>
             </a:pPr>
             <a:r>
-              <a:t>Students are prohibited from sending raw unvetted text like 'Sir please refer me'.</a:t>
-            </a:r>
-          </a:p>
-          <a:p>
-            <a:br/>
-            <a:pPr>
-              <a:defRPr sz="1200" b="1">
-                <a:solidFill>
-                  <a:srgbClr val="38BDF8"/>
-                </a:solidFill>
-              </a:defRPr>
-            </a:pPr>
-            <a:r>
-              <a:t>2. GitHub Repository Staking:</a:t>
-            </a:r>
-          </a:p>
-          <a:p>
-            <a:pPr>
-              <a:defRPr sz="1100">
-                <a:solidFill>
-                  <a:srgbClr val="94A3B8"/>
-                </a:solidFill>
-              </a:defRPr>
-            </a:pPr>
-            <a:r>
-              <a:t>Student inputs their actual GitHub repository or Pull Request addressing a real problem.</a:t>
-            </a:r>
-          </a:p>
-          <a:p>
-            <a:br/>
-            <a:pPr>
-              <a:defRPr sz="1200" b="1">
-                <a:solidFill>
-                  <a:srgbClr val="38BDF8"/>
-                </a:solidFill>
-              </a:defRPr>
-            </a:pPr>
-            <a:r>
-              <a:t>3. AST Architecture Analysis:</a:t>
-            </a:r>
-          </a:p>
-          <a:p>
-            <a:pPr>
-              <a:defRPr sz="1100">
-                <a:solidFill>
-                  <a:srgbClr val="94A3B8"/>
-                </a:solidFill>
-              </a:defRPr>
-            </a:pPr>
-            <a:r>
-              <a:t>Engine analyzes test-to-code ratio, cyclomatic complexity, concurrency patterns, and P99 latency.</a:t>
-            </a:r>
-          </a:p>
-          <a:p>
-            <a:br/>
-            <a:pPr>
-              <a:defRPr sz="1200" b="1">
-                <a:solidFill>
-                  <a:srgbClr val="38BDF8"/>
-                </a:solidFill>
-              </a:defRPr>
-            </a:pPr>
-            <a:r>
-              <a:t>4. 60-Second Flash Dossier:</a:t>
-            </a:r>
-          </a:p>
-          <a:p>
-            <a:pPr>
-              <a:defRPr sz="1100">
-                <a:solidFill>
-                  <a:srgbClr val="94A3B8"/>
-                </a:solidFill>
-              </a:defRPr>
-            </a:pPr>
-            <a:r>
-              <a:t>Generates a clean, verified candidate scorecard that alumni can evaluate in under 60 seconds.</a:t>
+              <a:t>Zero Raw Text Allowed. Students attach an active GitHub repo or PR; the AST engine automatically evaluates code depth, test ratios, and architectural cleanliness.</a:t>
             </a:r>
           </a:p>
         </p:txBody>
@@ -5170,16 +4824,16 @@
         </p:nvSpPr>
         <p:spPr>
           <a:xfrm>
-            <a:off x="6217920" y="2011680"/>
-            <a:ext cx="5212080" cy="4114800"/>
+            <a:off x="6172200" y="1920240"/>
+            <a:ext cx="5257800" cy="1965960"/>
           </a:xfrm>
           <a:prstGeom prst="roundRect">
             <a:avLst/>
           </a:prstGeom>
           <a:solidFill>
-            <a:srgbClr val="111C36"/>
+            <a:srgbClr val="0A1024"/>
           </a:solidFill>
-          <a:ln>
+          <a:ln w="12700">
             <a:solidFill>
               <a:srgbClr val="C084FC"/>
             </a:solidFill>
@@ -5215,8 +4869,8 @@
         </p:nvSpPr>
         <p:spPr>
           <a:xfrm>
-            <a:off x="6400800" y="2194560"/>
-            <a:ext cx="4846320" cy="3749039"/>
+            <a:off x="6355080" y="2103120"/>
+            <a:ext cx="4892040" cy="1600200"/>
           </a:xfrm>
           <a:prstGeom prst="rect">
             <a:avLst/>
@@ -5230,98 +4884,213 @@
           <a:lstStyle/>
           <a:p>
             <a:pPr>
-              <a:defRPr sz="1600" b="1">
+              <a:defRPr sz="1500" b="1">
+                <a:solidFill>
+                  <a:srgbClr val="C084FC"/>
+                </a:solidFill>
+              </a:defRPr>
+            </a:pPr>
+            <a:r>
+              <a:t>Explainable Recommendations</a:t>
+            </a:r>
+          </a:p>
+          <a:p>
+            <a:br/>
+            <a:pPr>
+              <a:defRPr sz="1150">
+                <a:solidFill>
+                  <a:srgbClr val="94A3B8"/>
+                </a:solidFill>
+              </a:defRPr>
+            </a:pPr>
+            <a:r>
+              <a:t>Students and alumni see exact match rationale grounded in verified stack compatibility, shared university lineage, and specific technical blocker alignment.</a:t>
+            </a:r>
+          </a:p>
+        </p:txBody>
+      </p:sp>
+      <p:sp>
+        <p:nvSpPr>
+          <p:cNvPr id="10" name="Rounded Rectangle 9"/>
+          <p:cNvSpPr/>
+          <p:nvPr/>
+        </p:nvSpPr>
+        <p:spPr>
+          <a:xfrm>
+            <a:off x="731520" y="4069080"/>
+            <a:ext cx="5257800" cy="1965960"/>
+          </a:xfrm>
+          <a:prstGeom prst="roundRect">
+            <a:avLst/>
+          </a:prstGeom>
+          <a:solidFill>
+            <a:srgbClr val="0A1024"/>
+          </a:solidFill>
+          <a:ln w="12700">
+            <a:solidFill>
+              <a:srgbClr val="F472B6"/>
+            </a:solidFill>
+          </a:ln>
+        </p:spPr>
+        <p:style>
+          <a:lnRef idx="1">
+            <a:schemeClr val="accent1"/>
+          </a:lnRef>
+          <a:fillRef idx="3">
+            <a:schemeClr val="accent1"/>
+          </a:fillRef>
+          <a:effectRef idx="2">
+            <a:schemeClr val="accent1"/>
+          </a:effectRef>
+          <a:fontRef idx="minor">
+            <a:schemeClr val="lt1"/>
+          </a:fontRef>
+        </p:style>
+        <p:txBody>
+          <a:bodyPr rtlCol="0" anchor="ctr"/>
+          <a:lstStyle/>
+          <a:p>
+            <a:pPr algn="ctr"/>
+          </a:p>
+        </p:txBody>
+      </p:sp>
+      <p:sp>
+        <p:nvSpPr>
+          <p:cNvPr id="11" name="TextBox 10"/>
+          <p:cNvSpPr txBox="1"/>
+          <p:nvPr/>
+        </p:nvSpPr>
+        <p:spPr>
+          <a:xfrm>
+            <a:off x="914400" y="4251960"/>
+            <a:ext cx="4892040" cy="1600200"/>
+          </a:xfrm>
+          <a:prstGeom prst="rect">
+            <a:avLst/>
+          </a:prstGeom>
+          <a:noFill/>
+        </p:spPr>
+        <p:txBody>
+          <a:bodyPr wrap="square">
+            <a:spAutoFit/>
+          </a:bodyPr>
+          <a:lstStyle/>
+          <a:p>
+            <a:pPr>
+              <a:defRPr sz="1500" b="1">
                 <a:solidFill>
                   <a:srgbClr val="F472B6"/>
                 </a:solidFill>
               </a:defRPr>
             </a:pPr>
             <a:r>
-              <a:t>Generated 1-Minute Executive Dossier:</a:t>
-            </a:r>
-          </a:p>
-          <a:p>
-            <a:pPr>
-              <a:defRPr sz="1100">
-                <a:solidFill>
-                  <a:srgbClr val="F8FAFC"/>
-                </a:solidFill>
-              </a:defRPr>
-            </a:pPr>
-            <a:r>
-              <a:t>• Code Readiness Score: 94 / 100 (Top 5% Tier)</a:t>
-            </a:r>
-          </a:p>
-          <a:p>
-            <a:pPr>
-              <a:defRPr sz="1100">
-                <a:solidFill>
-                  <a:srgbClr val="F8FAFC"/>
-                </a:solidFill>
-              </a:defRPr>
-            </a:pPr>
-            <a:r>
-              <a:t>• Primary Stack: Go / Distributed Consistent Hashing</a:t>
-            </a:r>
-          </a:p>
-          <a:p>
-            <a:pPr>
-              <a:defRPr sz="1100">
-                <a:solidFill>
-                  <a:srgbClr val="F8FAFC"/>
-                </a:solidFill>
-              </a:defRPr>
-            </a:pPr>
-            <a:r>
-              <a:t>• Test Coverage: 92.4% Unit &amp; Integration Suites</a:t>
-            </a:r>
-          </a:p>
-          <a:p>
-            <a:pPr>
-              <a:defRPr sz="1100">
-                <a:solidFill>
-                  <a:srgbClr val="F8FAFC"/>
-                </a:solidFill>
-              </a:defRPr>
-            </a:pPr>
-            <a:r>
-              <a:t>• P99 Benchmark: 14ms Latency at 10k RPS</a:t>
-            </a:r>
-          </a:p>
-          <a:p>
-            <a:pPr>
-              <a:defRPr sz="1100">
-                <a:solidFill>
-                  <a:srgbClr val="F8FAFC"/>
-                </a:solidFill>
-              </a:defRPr>
-            </a:pPr>
-            <a:r>
-              <a:t>• Memory Analysis: Zero Goroutine Leaks (pprof verified)</a:t>
-            </a:r>
-          </a:p>
-          <a:p>
-            <a:pPr>
-              <a:defRPr sz="1100">
-                <a:solidFill>
-                  <a:srgbClr val="F8FAFC"/>
-                </a:solidFill>
-              </a:defRPr>
-            </a:pPr>
-            <a:r>
-              <a:t>• Architectural Highlight: Robust virtual-node hashing ring with graceful node failover and zero cache drops.</a:t>
-            </a:r>
-          </a:p>
-          <a:p>
-            <a:pPr>
-              <a:defRPr sz="1100">
-                <a:solidFill>
-                  <a:srgbClr val="F8FAFC"/>
-                </a:solidFill>
-              </a:defRPr>
-            </a:pPr>
-            <a:r>
-              <a:t>• Target Action: 1-Click ATS Referral Ready</a:t>
+              <a:t>1-Click ATS Referral Radar</a:t>
+            </a:r>
+          </a:p>
+          <a:p>
+            <a:br/>
+            <a:pPr>
+              <a:defRPr sz="1150">
+                <a:solidFill>
+                  <a:srgbClr val="94A3B8"/>
+                </a:solidFill>
+              </a:defRPr>
+            </a:pPr>
+            <a:r>
+              <a:t>Alumni make referral decisions in under 60 seconds. Pre-formatted dossiers push straight to company ATS (Workday, Lever, Greenhouse) with 0 screening friction.</a:t>
+            </a:r>
+          </a:p>
+        </p:txBody>
+      </p:sp>
+      <p:sp>
+        <p:nvSpPr>
+          <p:cNvPr id="12" name="Rounded Rectangle 11"/>
+          <p:cNvSpPr/>
+          <p:nvPr/>
+        </p:nvSpPr>
+        <p:spPr>
+          <a:xfrm>
+            <a:off x="6172200" y="4069080"/>
+            <a:ext cx="5257800" cy="1965960"/>
+          </a:xfrm>
+          <a:prstGeom prst="roundRect">
+            <a:avLst/>
+          </a:prstGeom>
+          <a:solidFill>
+            <a:srgbClr val="0A1024"/>
+          </a:solidFill>
+          <a:ln w="12700">
+            <a:solidFill>
+              <a:srgbClr val="34D399"/>
+            </a:solidFill>
+          </a:ln>
+        </p:spPr>
+        <p:style>
+          <a:lnRef idx="1">
+            <a:schemeClr val="accent1"/>
+          </a:lnRef>
+          <a:fillRef idx="3">
+            <a:schemeClr val="accent1"/>
+          </a:fillRef>
+          <a:effectRef idx="2">
+            <a:schemeClr val="accent1"/>
+          </a:effectRef>
+          <a:fontRef idx="minor">
+            <a:schemeClr val="lt1"/>
+          </a:fontRef>
+        </p:style>
+        <p:txBody>
+          <a:bodyPr rtlCol="0" anchor="ctr"/>
+          <a:lstStyle/>
+          <a:p>
+            <a:pPr algn="ctr"/>
+          </a:p>
+        </p:txBody>
+      </p:sp>
+      <p:sp>
+        <p:nvSpPr>
+          <p:cNvPr id="13" name="TextBox 12"/>
+          <p:cNvSpPr txBox="1"/>
+          <p:nvPr/>
+        </p:nvSpPr>
+        <p:spPr>
+          <a:xfrm>
+            <a:off x="6355080" y="4251960"/>
+            <a:ext cx="4892040" cy="1600200"/>
+          </a:xfrm>
+          <a:prstGeom prst="rect">
+            <a:avLst/>
+          </a:prstGeom>
+          <a:noFill/>
+        </p:spPr>
+        <p:txBody>
+          <a:bodyPr wrap="square">
+            <a:spAutoFit/>
+          </a:bodyPr>
+          <a:lstStyle/>
+          <a:p>
+            <a:pPr>
+              <a:defRPr sz="1500" b="1">
+                <a:solidFill>
+                  <a:srgbClr val="34D399"/>
+                </a:solidFill>
+              </a:defRPr>
+            </a:pPr>
+            <a:r>
+              <a:t>Micro-Bounties &amp; Capstones</a:t>
+            </a:r>
+          </a:p>
+          <a:p>
+            <a:br/>
+            <a:pPr>
+              <a:defRPr sz="1150">
+                <a:solidFill>
+                  <a:srgbClr val="94A3B8"/>
+                </a:solidFill>
+              </a:defRPr>
+            </a:pPr>
+            <a:r>
+              <a:t>Alumni founders post ₹5k–₹25k feature tickets solved in 48 hours; faculty link academic research capstones with alumni tech leads from Google &amp; Microsoft.</a:t>
             </a:r>
           </a:p>
         </p:txBody>
@@ -5359,11 +5128,11 @@
             <a:avLst/>
           </a:prstGeom>
           <a:solidFill>
-            <a:srgbClr val="040712"/>
+            <a:srgbClr val="030611"/>
           </a:solidFill>
           <a:ln>
             <a:solidFill>
-              <a:srgbClr val="040712"/>
+              <a:srgbClr val="030611"/>
             </a:solidFill>
           </a:ln>
         </p:spPr>
@@ -5398,7 +5167,7 @@
         <p:spPr>
           <a:xfrm>
             <a:off x="731520" y="365760"/>
-            <a:ext cx="10698480" cy="365760"/>
+            <a:ext cx="10728655" cy="320040"/>
           </a:xfrm>
           <a:prstGeom prst="rect">
             <a:avLst/>
@@ -5406,20 +5175,20 @@
           <a:noFill/>
         </p:spPr>
         <p:txBody>
-          <a:bodyPr wrap="square">
+          <a:bodyPr wrap="none">
             <a:spAutoFit/>
           </a:bodyPr>
           <a:lstStyle/>
           <a:p>
             <a:pPr>
-              <a:defRPr sz="900" b="1">
+              <a:defRPr sz="1000" b="1">
                 <a:solidFill>
                   <a:srgbClr val="F472B6"/>
                 </a:solidFill>
               </a:defRPr>
             </a:pPr>
             <a:r>
-              <a:t>FEATURE SPOTLIGHT 2</a:t>
+              <a:t>DIFFERENTIATING ADVANTAGE   •   05 / 07</a:t>
             </a:r>
           </a:p>
         </p:txBody>
@@ -5432,8 +5201,8 @@
         </p:nvSpPr>
         <p:spPr>
           <a:xfrm>
-            <a:off x="731520" y="685800"/>
-            <a:ext cx="10698480" cy="731520"/>
+            <a:off x="731520" y="658368"/>
+            <a:ext cx="10728655" cy="594360"/>
           </a:xfrm>
           <a:prstGeom prst="rect">
             <a:avLst/>
@@ -5441,20 +5210,20 @@
           <a:noFill/>
         </p:spPr>
         <p:txBody>
-          <a:bodyPr wrap="square">
+          <a:bodyPr wrap="none">
             <a:spAutoFit/>
           </a:bodyPr>
           <a:lstStyle/>
           <a:p>
             <a:pPr>
-              <a:defRPr sz="2400" b="1">
+              <a:defRPr sz="2200" b="1">
                 <a:solidFill>
                   <a:srgbClr val="F8FAFC"/>
                 </a:solidFill>
               </a:defRPr>
             </a:pPr>
             <a:r>
-              <a:t>Alumnus Referral Radar: Zero-Lag Decisions</a:t>
+              <a:t>Traditional Directory vs. LinkX Autonomous Network</a:t>
             </a:r>
           </a:p>
         </p:txBody>
@@ -5467,8 +5236,8 @@
         </p:nvSpPr>
         <p:spPr>
           <a:xfrm>
-            <a:off x="731520" y="1325880"/>
-            <a:ext cx="10698480" cy="365760"/>
+            <a:off x="731520" y="1234440"/>
+            <a:ext cx="10728655" cy="411480"/>
           </a:xfrm>
           <a:prstGeom prst="rect">
             <a:avLst/>
@@ -5476,20 +5245,20 @@
           <a:noFill/>
         </p:spPr>
         <p:txBody>
-          <a:bodyPr wrap="square">
+          <a:bodyPr wrap="none">
             <a:spAutoFit/>
           </a:bodyPr>
           <a:lstStyle/>
           <a:p>
             <a:pPr>
-              <a:defRPr sz="1200">
+              <a:defRPr sz="1150">
                 <a:solidFill>
                   <a:srgbClr val="94A3B8"/>
                 </a:solidFill>
               </a:defRPr>
             </a:pPr>
             <a:r>
-              <a:t>Respecting alumni time with high-conviction 1-click ATS referrals.</a:t>
+              <a:t>Why traditional college databases fail and how LinkX guarantees high-signal engagement.</a:t>
             </a:r>
           </a:p>
         </p:txBody>
@@ -5502,18 +5271,18 @@
         </p:nvSpPr>
         <p:spPr>
           <a:xfrm>
-            <a:off x="731520" y="2011680"/>
-            <a:ext cx="5257800" cy="1920240"/>
+            <a:off x="731520" y="1920240"/>
+            <a:ext cx="5257800" cy="4114800"/>
           </a:xfrm>
           <a:prstGeom prst="roundRect">
             <a:avLst/>
           </a:prstGeom>
           <a:solidFill>
-            <a:srgbClr val="0C1326"/>
+            <a:srgbClr val="0A1024"/>
           </a:solidFill>
           <a:ln>
             <a:solidFill>
-              <a:srgbClr val="38BDF8"/>
+              <a:srgbClr val="475569"/>
             </a:solidFill>
           </a:ln>
         </p:spPr>
@@ -5547,8 +5316,8 @@
         </p:nvSpPr>
         <p:spPr>
           <a:xfrm>
-            <a:off x="914400" y="2194560"/>
-            <a:ext cx="4892040" cy="1554480"/>
+            <a:off x="914400" y="2103120"/>
+            <a:ext cx="4892040" cy="3749039"/>
           </a:xfrm>
           <a:prstGeom prst="rect">
             <a:avLst/>
@@ -5562,27 +5331,74 @@
           <a:lstStyle/>
           <a:p>
             <a:pPr>
-              <a:defRPr sz="1500" b="1">
-                <a:solidFill>
-                  <a:srgbClr val="38BDF8"/>
-                </a:solidFill>
-              </a:defRPr>
-            </a:pPr>
-            <a:r>
-              <a:t>No Resume Screening Fatigue</a:t>
-            </a:r>
-          </a:p>
-          <a:p>
-            <a:br/>
-            <a:pPr>
-              <a:defRPr sz="1200">
+              <a:defRPr sz="1600" b="1">
+                <a:solidFill>
+                  <a:srgbClr val="F87171"/>
+                </a:solidFill>
+              </a:defRPr>
+            </a:pPr>
+            <a:r>
+              <a:t>TRADITIONAL DIRECTORY SEARCH</a:t>
+            </a:r>
+          </a:p>
+          <a:p>
+            <a:pPr>
+              <a:defRPr sz="1050">
                 <a:solidFill>
                   <a:srgbClr val="94A3B8"/>
                 </a:solidFill>
               </a:defRPr>
             </a:pPr>
             <a:r>
-              <a:t>Alumni receive a concise 1-minute scorecard highlighting actual code quality, eliminating the need to read ambiguous 5-page resumes.</a:t>
+              <a:t>• Keyword &amp; Filter Search: Requires students to manually browse thousands of stale records.</a:t>
+            </a:r>
+          </a:p>
+          <a:p>
+            <a:pPr>
+              <a:defRPr sz="1050">
+                <a:solidFill>
+                  <a:srgbClr val="94A3B8"/>
+                </a:solidFill>
+              </a:defRPr>
+            </a:pPr>
+            <a:r>
+              <a:t>• No Active Intent Signal: Alumni profiles sit dormant; students have no clue if alumni are available.</a:t>
+            </a:r>
+          </a:p>
+          <a:p>
+            <a:pPr>
+              <a:defRPr sz="1050">
+                <a:solidFill>
+                  <a:srgbClr val="94A3B8"/>
+                </a:solidFill>
+              </a:defRPr>
+            </a:pPr>
+            <a:r>
+              <a:t>• Cold-DM Spam: 98% of cold messages ignored; alumni close inboxes due to resume fatigue.</a:t>
+            </a:r>
+          </a:p>
+          <a:p>
+            <a:pPr>
+              <a:defRPr sz="1050">
+                <a:solidFill>
+                  <a:srgbClr val="94A3B8"/>
+                </a:solidFill>
+              </a:defRPr>
+            </a:pPr>
+            <a:r>
+              <a:t>• Zero Proof-of-Work: Relies on generic self-reported resumes without code verification.</a:t>
+            </a:r>
+          </a:p>
+          <a:p>
+            <a:pPr>
+              <a:defRPr sz="1050">
+                <a:solidFill>
+                  <a:srgbClr val="94A3B8"/>
+                </a:solidFill>
+              </a:defRPr>
+            </a:pPr>
+            <a:r>
+              <a:t>• Zero Accreditation Telemetry: College administrations have zero visibility into actual hiring conversions.</a:t>
             </a:r>
           </a:p>
         </p:txBody>
@@ -5595,16 +5411,16 @@
         </p:nvSpPr>
         <p:spPr>
           <a:xfrm>
-            <a:off x="6172200" y="2011680"/>
-            <a:ext cx="5257800" cy="1920240"/>
+            <a:off x="6217920" y="1920240"/>
+            <a:ext cx="5257800" cy="4114800"/>
           </a:xfrm>
           <a:prstGeom prst="roundRect">
             <a:avLst/>
           </a:prstGeom>
           <a:solidFill>
-            <a:srgbClr val="0C1326"/>
+            <a:srgbClr val="0A1024"/>
           </a:solidFill>
-          <a:ln>
+          <a:ln w="19050">
             <a:solidFill>
               <a:srgbClr val="F472B6"/>
             </a:solidFill>
@@ -5640,8 +5456,8 @@
         </p:nvSpPr>
         <p:spPr>
           <a:xfrm>
-            <a:off x="6355080" y="2194560"/>
-            <a:ext cx="4892040" cy="1554480"/>
+            <a:off x="6400800" y="2103120"/>
+            <a:ext cx="4892040" cy="3749039"/>
           </a:xfrm>
           <a:prstGeom prst="rect">
             <a:avLst/>
@@ -5655,213 +5471,74 @@
           <a:lstStyle/>
           <a:p>
             <a:pPr>
-              <a:defRPr sz="1500" b="1">
-                <a:solidFill>
-                  <a:srgbClr val="F472B6"/>
-                </a:solidFill>
-              </a:defRPr>
-            </a:pPr>
-            <a:r>
-              <a:t>1-Click ATS Dispatch</a:t>
-            </a:r>
-          </a:p>
-          <a:p>
-            <a:br/>
-            <a:pPr>
-              <a:defRPr sz="1200">
-                <a:solidFill>
-                  <a:srgbClr val="94A3B8"/>
-                </a:solidFill>
-              </a:defRPr>
-            </a:pPr>
-            <a:r>
-              <a:t>With a single click, the alumnus validates the student's work and automatically pushes a warm referral into their internal corporate ATS pipeline.</a:t>
-            </a:r>
-          </a:p>
-        </p:txBody>
-      </p:sp>
-      <p:sp>
-        <p:nvSpPr>
-          <p:cNvPr id="10" name="Rounded Rectangle 9"/>
-          <p:cNvSpPr/>
-          <p:nvPr/>
-        </p:nvSpPr>
-        <p:spPr>
-          <a:xfrm>
-            <a:off x="731520" y="4114800"/>
-            <a:ext cx="5257800" cy="1920240"/>
-          </a:xfrm>
-          <a:prstGeom prst="roundRect">
-            <a:avLst/>
-          </a:prstGeom>
-          <a:solidFill>
-            <a:srgbClr val="0C1326"/>
-          </a:solidFill>
-          <a:ln>
-            <a:solidFill>
-              <a:srgbClr val="C084FC"/>
-            </a:solidFill>
-          </a:ln>
-        </p:spPr>
-        <p:style>
-          <a:lnRef idx="1">
-            <a:schemeClr val="accent1"/>
-          </a:lnRef>
-          <a:fillRef idx="3">
-            <a:schemeClr val="accent1"/>
-          </a:fillRef>
-          <a:effectRef idx="2">
-            <a:schemeClr val="accent1"/>
-          </a:effectRef>
-          <a:fontRef idx="minor">
-            <a:schemeClr val="lt1"/>
-          </a:fontRef>
-        </p:style>
-        <p:txBody>
-          <a:bodyPr rtlCol="0" anchor="ctr"/>
-          <a:lstStyle/>
-          <a:p>
-            <a:pPr algn="ctr"/>
-          </a:p>
-        </p:txBody>
-      </p:sp>
-      <p:sp>
-        <p:nvSpPr>
-          <p:cNvPr id="11" name="TextBox 10"/>
-          <p:cNvSpPr txBox="1"/>
-          <p:nvPr/>
-        </p:nvSpPr>
-        <p:spPr>
-          <a:xfrm>
-            <a:off x="914400" y="4297680"/>
-            <a:ext cx="4892040" cy="1554480"/>
-          </a:xfrm>
-          <a:prstGeom prst="rect">
-            <a:avLst/>
-          </a:prstGeom>
-          <a:noFill/>
-        </p:spPr>
-        <p:txBody>
-          <a:bodyPr wrap="square">
-            <a:spAutoFit/>
-          </a:bodyPr>
-          <a:lstStyle/>
-          <a:p>
-            <a:pPr>
-              <a:defRPr sz="1500" b="1">
-                <a:solidFill>
-                  <a:srgbClr val="C084FC"/>
-                </a:solidFill>
-              </a:defRPr>
-            </a:pPr>
-            <a:r>
-              <a:t>Constructive Code Feedback Loop</a:t>
-            </a:r>
-          </a:p>
-          <a:p>
-            <a:br/>
-            <a:pPr>
-              <a:defRPr sz="1200">
-                <a:solidFill>
-                  <a:srgbClr val="94A3B8"/>
-                </a:solidFill>
-              </a:defRPr>
-            </a:pPr>
-            <a:r>
-              <a:t>If the code isn't ready yet, the alumnus provides 2 structured lines of technical guidance. The student refactors and can re-apply once passing benchmarks.</a:t>
-            </a:r>
-          </a:p>
-        </p:txBody>
-      </p:sp>
-      <p:sp>
-        <p:nvSpPr>
-          <p:cNvPr id="12" name="Rounded Rectangle 11"/>
-          <p:cNvSpPr/>
-          <p:nvPr/>
-        </p:nvSpPr>
-        <p:spPr>
-          <a:xfrm>
-            <a:off x="6172200" y="4114800"/>
-            <a:ext cx="5257800" cy="1920240"/>
-          </a:xfrm>
-          <a:prstGeom prst="roundRect">
-            <a:avLst/>
-          </a:prstGeom>
-          <a:solidFill>
-            <a:srgbClr val="0C1326"/>
-          </a:solidFill>
-          <a:ln>
-            <a:solidFill>
-              <a:srgbClr val="38BDF8"/>
-            </a:solidFill>
-          </a:ln>
-        </p:spPr>
-        <p:style>
-          <a:lnRef idx="1">
-            <a:schemeClr val="accent1"/>
-          </a:lnRef>
-          <a:fillRef idx="3">
-            <a:schemeClr val="accent1"/>
-          </a:fillRef>
-          <a:effectRef idx="2">
-            <a:schemeClr val="accent1"/>
-          </a:effectRef>
-          <a:fontRef idx="minor">
-            <a:schemeClr val="lt1"/>
-          </a:fontRef>
-        </p:style>
-        <p:txBody>
-          <a:bodyPr rtlCol="0" anchor="ctr"/>
-          <a:lstStyle/>
-          <a:p>
-            <a:pPr algn="ctr"/>
-          </a:p>
-        </p:txBody>
-      </p:sp>
-      <p:sp>
-        <p:nvSpPr>
-          <p:cNvPr id="13" name="TextBox 12"/>
-          <p:cNvSpPr txBox="1"/>
-          <p:nvPr/>
-        </p:nvSpPr>
-        <p:spPr>
-          <a:xfrm>
-            <a:off x="6355080" y="4297680"/>
-            <a:ext cx="4892040" cy="1554480"/>
-          </a:xfrm>
-          <a:prstGeom prst="rect">
-            <a:avLst/>
-          </a:prstGeom>
-          <a:noFill/>
-        </p:spPr>
-        <p:txBody>
-          <a:bodyPr wrap="square">
-            <a:spAutoFit/>
-          </a:bodyPr>
-          <a:lstStyle/>
-          <a:p>
-            <a:pPr>
-              <a:defRPr sz="1500" b="1">
-                <a:solidFill>
-                  <a:srgbClr val="38BDF8"/>
-                </a:solidFill>
-              </a:defRPr>
-            </a:pPr>
-            <a:r>
-              <a:t>Staked Reputation &amp; Bonus Protection</a:t>
-            </a:r>
-          </a:p>
-          <a:p>
-            <a:br/>
-            <a:pPr>
-              <a:defRPr sz="1200">
-                <a:solidFill>
-                  <a:srgbClr val="94A3B8"/>
-                </a:solidFill>
-              </a:defRPr>
-            </a:pPr>
-            <a:r>
-              <a:t>Alumni protect their internal company reputation by referring only verified, test-covered candidates while unlocking company referral bonuses (up to ₹1.5L).</a:t>
+              <a:defRPr sz="1600" b="1">
+                <a:solidFill>
+                  <a:srgbClr val="34D399"/>
+                </a:solidFill>
+              </a:defRPr>
+            </a:pPr>
+            <a:r>
+              <a:t>LINKX AUTONOMOUS RECIPROCITY</a:t>
+            </a:r>
+          </a:p>
+          <a:p>
+            <a:pPr>
+              <a:defRPr sz="1050">
+                <a:solidFill>
+                  <a:srgbClr val="F8FAFC"/>
+                </a:solidFill>
+              </a:defRPr>
+            </a:pPr>
+            <a:r>
+              <a:t>✓ Natural-Language Intent Input: Students state engineering challenges &amp; target roles directly.</a:t>
+            </a:r>
+          </a:p>
+          <a:p>
+            <a:pPr>
+              <a:defRPr sz="1050">
+                <a:solidFill>
+                  <a:srgbClr val="F8FAFC"/>
+                </a:solidFill>
+              </a:defRPr>
+            </a:pPr>
+            <a:r>
+              <a:t>✓ Real-Time Availability Radar: Active badges show referral capacity, bounty slots, and mentoring status.</a:t>
+            </a:r>
+          </a:p>
+          <a:p>
+            <a:pPr>
+              <a:defRPr sz="1050">
+                <a:solidFill>
+                  <a:srgbClr val="F8FAFC"/>
+                </a:solidFill>
+              </a:defRPr>
+            </a:pPr>
+            <a:r>
+              <a:t>✓ Zero Cold DMs &amp; Spam Banned: Mandatory code attachment; only verified dossiers reach alumni inboxes.</a:t>
+            </a:r>
+          </a:p>
+          <a:p>
+            <a:pPr>
+              <a:defRPr sz="1050">
+                <a:solidFill>
+                  <a:srgbClr val="F8FAFC"/>
+                </a:solidFill>
+              </a:defRPr>
+            </a:pPr>
+            <a:r>
+              <a:t>✓ AST Code Readiness Engine: Parses actual GitHub repo architecture, unit test ratios, and P99 latency.</a:t>
+            </a:r>
+          </a:p>
+          <a:p>
+            <a:pPr>
+              <a:defRPr sz="1050">
+                <a:solidFill>
+                  <a:srgbClr val="F8FAFC"/>
+                </a:solidFill>
+              </a:defRPr>
+            </a:pPr>
+            <a:r>
+              <a:t>✓ 1-Click ATS Referral Action: Dispatches pre-vetted dossiers directly into Workday/Greenhouse in 60s.</a:t>
             </a:r>
           </a:p>
         </p:txBody>
@@ -5899,11 +5576,11 @@
             <a:avLst/>
           </a:prstGeom>
           <a:solidFill>
-            <a:srgbClr val="040712"/>
+            <a:srgbClr val="030611"/>
           </a:solidFill>
           <a:ln>
             <a:solidFill>
-              <a:srgbClr val="040712"/>
+              <a:srgbClr val="030611"/>
             </a:solidFill>
           </a:ln>
         </p:spPr>
@@ -5938,7 +5615,7 @@
         <p:spPr>
           <a:xfrm>
             <a:off x="731520" y="365760"/>
-            <a:ext cx="10698480" cy="365760"/>
+            <a:ext cx="10728655" cy="320040"/>
           </a:xfrm>
           <a:prstGeom prst="rect">
             <a:avLst/>
@@ -5946,20 +5623,20 @@
           <a:noFill/>
         </p:spPr>
         <p:txBody>
-          <a:bodyPr wrap="square">
+          <a:bodyPr wrap="none">
             <a:spAutoFit/>
           </a:bodyPr>
           <a:lstStyle/>
           <a:p>
             <a:pPr>
-              <a:defRPr sz="900" b="1">
+              <a:defRPr sz="1000" b="1">
                 <a:solidFill>
                   <a:srgbClr val="F472B6"/>
                 </a:solidFill>
               </a:defRPr>
             </a:pPr>
             <a:r>
-              <a:t>FEATURE SPOTLIGHT 3</a:t>
+              <a:t>ARCHITECTURE &amp; PROTOTYPE   •   06 / 07</a:t>
             </a:r>
           </a:p>
         </p:txBody>
@@ -5972,8 +5649,8 @@
         </p:nvSpPr>
         <p:spPr>
           <a:xfrm>
-            <a:off x="731520" y="685800"/>
-            <a:ext cx="10698480" cy="731520"/>
+            <a:off x="731520" y="658368"/>
+            <a:ext cx="10728655" cy="594360"/>
           </a:xfrm>
           <a:prstGeom prst="rect">
             <a:avLst/>
@@ -5981,20 +5658,20 @@
           <a:noFill/>
         </p:spPr>
         <p:txBody>
-          <a:bodyPr wrap="square">
+          <a:bodyPr wrap="none">
             <a:spAutoFit/>
           </a:bodyPr>
           <a:lstStyle/>
           <a:p>
             <a:pPr>
-              <a:defRPr sz="2400" b="1">
+              <a:defRPr sz="2200" b="1">
                 <a:solidFill>
                   <a:srgbClr val="F8FAFC"/>
                 </a:solidFill>
               </a:defRPr>
             </a:pPr>
             <a:r>
-              <a:t>Opportunity Exchange: Micro-Bounties &amp; Capstones</a:t>
+              <a:t>Full-Stack Technology Stack &amp; Live Engine</a:t>
             </a:r>
           </a:p>
         </p:txBody>
@@ -6007,8 +5684,8 @@
         </p:nvSpPr>
         <p:spPr>
           <a:xfrm>
-            <a:off x="731520" y="1325880"/>
-            <a:ext cx="10698480" cy="365760"/>
+            <a:off x="731520" y="1234440"/>
+            <a:ext cx="10728655" cy="411480"/>
           </a:xfrm>
           <a:prstGeom prst="rect">
             <a:avLst/>
@@ -6016,20 +5693,20 @@
           <a:noFill/>
         </p:spPr>
         <p:txBody>
-          <a:bodyPr wrap="square">
+          <a:bodyPr wrap="none">
             <a:spAutoFit/>
           </a:bodyPr>
           <a:lstStyle/>
           <a:p>
             <a:pPr>
-              <a:defRPr sz="1200">
+              <a:defRPr sz="1150">
                 <a:solidFill>
                   <a:srgbClr val="94A3B8"/>
                 </a:solidFill>
               </a:defRPr>
             </a:pPr>
             <a:r>
-              <a:t>Connecting campus talent with live economic opportunities and industry mentorship.</a:t>
+              <a:t>High-performance, modular system powering 6 distinct campus portals.</a:t>
             </a:r>
           </a:p>
         </p:txBody>
@@ -6042,18 +5719,18 @@
         </p:nvSpPr>
         <p:spPr>
           <a:xfrm>
-            <a:off x="731520" y="2011680"/>
-            <a:ext cx="3429000" cy="4023360"/>
+            <a:off x="731520" y="1920240"/>
+            <a:ext cx="3429000" cy="2743200"/>
           </a:xfrm>
           <a:prstGeom prst="roundRect">
             <a:avLst/>
           </a:prstGeom>
           <a:solidFill>
-            <a:srgbClr val="0C1326"/>
+            <a:srgbClr val="0A1024"/>
           </a:solidFill>
-          <a:ln>
+          <a:ln w="12700">
             <a:solidFill>
-              <a:srgbClr val="F472B6"/>
+              <a:srgbClr val="38BDF8"/>
             </a:solidFill>
           </a:ln>
         </p:spPr>
@@ -6087,8 +5764,8 @@
         </p:nvSpPr>
         <p:spPr>
           <a:xfrm>
-            <a:off x="914400" y="2194560"/>
-            <a:ext cx="3063240" cy="3657600"/>
+            <a:off x="914400" y="2057400"/>
+            <a:ext cx="3063240" cy="2468880"/>
           </a:xfrm>
           <a:prstGeom prst="rect">
             <a:avLst/>
@@ -6102,27 +5779,74 @@
           <a:lstStyle/>
           <a:p>
             <a:pPr>
-              <a:defRPr sz="1600" b="1">
-                <a:solidFill>
-                  <a:srgbClr val="F472B6"/>
-                </a:solidFill>
-              </a:defRPr>
-            </a:pPr>
-            <a:r>
-              <a:t>Startup Micro-Bounties</a:t>
-            </a:r>
-          </a:p>
-          <a:p>
-            <a:br/>
-            <a:pPr>
-              <a:defRPr sz="1200">
+              <a:defRPr sz="1400" b="1">
+                <a:solidFill>
+                  <a:srgbClr val="38BDF8"/>
+                </a:solidFill>
+              </a:defRPr>
+            </a:pPr>
+            <a:r>
+              <a:t>Frontend Client</a:t>
+            </a:r>
+          </a:p>
+          <a:p>
+            <a:pPr>
+              <a:defRPr sz="1000" b="1">
+                <a:solidFill>
+                  <a:srgbClr val="F8FAFC"/>
+                </a:solidFill>
+              </a:defRPr>
+            </a:pPr>
+            <a:r>
+              <a:t>Modern ES6+ SPA / React 19</a:t>
+            </a:r>
+          </a:p>
+          <a:p>
+            <a:pPr>
+              <a:defRPr sz="950">
                 <a:solidFill>
                   <a:srgbClr val="94A3B8"/>
                 </a:solidFill>
               </a:defRPr>
             </a:pPr>
             <a:r>
-              <a:t>Alumni Founders post urgent production tickets (₹5,000 to ₹25,000). Students solve webhooks, caching, or SDK features in 48-72 hours, earning stipends and direct PPO interviews.</a:t>
+              <a:t>• Tailwind CSS Cyber Obsidian design tokens</a:t>
+            </a:r>
+          </a:p>
+          <a:p>
+            <a:pPr>
+              <a:defRPr sz="950">
+                <a:solidFill>
+                  <a:srgbClr val="94A3B8"/>
+                </a:solidFill>
+              </a:defRPr>
+            </a:pPr>
+            <a:r>
+              <a:t>• Hardware-accelerated mesh gradients &amp; ambient orbs</a:t>
+            </a:r>
+          </a:p>
+          <a:p>
+            <a:pPr>
+              <a:defRPr sz="950">
+                <a:solidFill>
+                  <a:srgbClr val="94A3B8"/>
+                </a:solidFill>
+              </a:defRPr>
+            </a:pPr>
+            <a:r>
+              <a:t>• Lucide icons &amp; responsive RBAC interface</a:t>
+            </a:r>
+          </a:p>
+          <a:p>
+            <a:pPr>
+              <a:defRPr sz="950">
+                <a:solidFill>
+                  <a:srgbClr val="94A3B8"/>
+                </a:solidFill>
+              </a:defRPr>
+            </a:pPr>
+            <a:r>
+              <a:t>• Sub-50ms DOM updates &amp; zero bundle latency</a:t>
             </a:r>
           </a:p>
         </p:txBody>
@@ -6135,16 +5859,16 @@
         </p:nvSpPr>
         <p:spPr>
           <a:xfrm>
-            <a:off x="4343400" y="2011680"/>
-            <a:ext cx="3429000" cy="4023360"/>
+            <a:off x="4343400" y="1920240"/>
+            <a:ext cx="3429000" cy="2743200"/>
           </a:xfrm>
           <a:prstGeom prst="roundRect">
             <a:avLst/>
           </a:prstGeom>
           <a:solidFill>
-            <a:srgbClr val="0C1326"/>
+            <a:srgbClr val="0A1024"/>
           </a:solidFill>
-          <a:ln>
+          <a:ln w="12700">
             <a:solidFill>
               <a:srgbClr val="C084FC"/>
             </a:solidFill>
@@ -6180,8 +5904,8 @@
         </p:nvSpPr>
         <p:spPr>
           <a:xfrm>
-            <a:off x="4526280" y="2194560"/>
-            <a:ext cx="3063240" cy="3657600"/>
+            <a:off x="4526280" y="2057400"/>
+            <a:ext cx="3063240" cy="2468880"/>
           </a:xfrm>
           <a:prstGeom prst="rect">
             <a:avLst/>
@@ -6195,27 +5919,74 @@
           <a:lstStyle/>
           <a:p>
             <a:pPr>
-              <a:defRPr sz="1600" b="1">
+              <a:defRPr sz="1400" b="1">
                 <a:solidFill>
                   <a:srgbClr val="C084FC"/>
                 </a:solidFill>
               </a:defRPr>
             </a:pPr>
             <a:r>
-              <a:t>Industry-Mentored Capstones</a:t>
-            </a:r>
-          </a:p>
-          <a:p>
-            <a:br/>
-            <a:pPr>
-              <a:defRPr sz="1200">
+              <a:t>Backend &amp; REST Core</a:t>
+            </a:r>
+          </a:p>
+          <a:p>
+            <a:pPr>
+              <a:defRPr sz="1000" b="1">
+                <a:solidFill>
+                  <a:srgbClr val="F8FAFC"/>
+                </a:solidFill>
+              </a:defRPr>
+            </a:pPr>
+            <a:r>
+              <a:t>Node.js &amp; Express REST API</a:t>
+            </a:r>
+          </a:p>
+          <a:p>
+            <a:pPr>
+              <a:defRPr sz="950">
                 <a:solidFill>
                   <a:srgbClr val="94A3B8"/>
                 </a:solidFill>
               </a:defRPr>
             </a:pPr>
             <a:r>
-              <a:t>Faculty link final-year student capstones with alumni engineering leads at Google, Microsoft, and Swiggy. Replaces dummy college projects with production code.</a:t>
+              <a:t>• ES Modules architecture (Node.js v20+)</a:t>
+            </a:r>
+          </a:p>
+          <a:p>
+            <a:pPr>
+              <a:defRPr sz="950">
+                <a:solidFill>
+                  <a:srgbClr val="94A3B8"/>
+                </a:solidFill>
+              </a:defRPr>
+            </a:pPr>
+            <a:r>
+              <a:t>• Role-Based Access Control (RBAC) across 6 roles</a:t>
+            </a:r>
+          </a:p>
+          <a:p>
+            <a:pPr>
+              <a:defRPr sz="950">
+                <a:solidFill>
+                  <a:srgbClr val="94A3B8"/>
+                </a:solidFill>
+              </a:defRPr>
+            </a:pPr>
+            <a:r>
+              <a:t>• ACID-safe persistent JSON datastore (db.json)</a:t>
+            </a:r>
+          </a:p>
+          <a:p>
+            <a:pPr>
+              <a:defRPr sz="950">
+                <a:solidFill>
+                  <a:srgbClr val="94A3B8"/>
+                </a:solidFill>
+              </a:defRPr>
+            </a:pPr>
+            <a:r>
+              <a:t>• CORS &amp; high-throughput API endpoints</a:t>
             </a:r>
           </a:p>
         </p:txBody>
@@ -6228,18 +5999,18 @@
         </p:nvSpPr>
         <p:spPr>
           <a:xfrm>
-            <a:off x="7955280" y="2011680"/>
-            <a:ext cx="3429000" cy="4023360"/>
+            <a:off x="7955280" y="1920240"/>
+            <a:ext cx="3429000" cy="2743200"/>
           </a:xfrm>
           <a:prstGeom prst="roundRect">
             <a:avLst/>
           </a:prstGeom>
           <a:solidFill>
-            <a:srgbClr val="0C1326"/>
+            <a:srgbClr val="0A1024"/>
           </a:solidFill>
-          <a:ln>
+          <a:ln w="12700">
             <a:solidFill>
-              <a:srgbClr val="38BDF8"/>
+              <a:srgbClr val="F472B6"/>
             </a:solidFill>
           </a:ln>
         </p:spPr>
@@ -6273,8 +6044,8 @@
         </p:nvSpPr>
         <p:spPr>
           <a:xfrm>
-            <a:off x="8138160" y="2194560"/>
-            <a:ext cx="3063240" cy="3657600"/>
+            <a:off x="8138160" y="2057400"/>
+            <a:ext cx="3063240" cy="2468880"/>
           </a:xfrm>
           <a:prstGeom prst="rect">
             <a:avLst/>
@@ -6288,27 +6059,174 @@
           <a:lstStyle/>
           <a:p>
             <a:pPr>
-              <a:defRPr sz="1600" b="1">
-                <a:solidFill>
-                  <a:srgbClr val="38BDF8"/>
-                </a:solidFill>
-              </a:defRPr>
-            </a:pPr>
-            <a:r>
-              <a:t>Targeted Campus Requisitions</a:t>
-            </a:r>
-          </a:p>
-          <a:p>
+              <a:defRPr sz="1400" b="1">
+                <a:solidFill>
+                  <a:srgbClr val="F472B6"/>
+                </a:solidFill>
+              </a:defRPr>
+            </a:pPr>
+            <a:r>
+              <a:t>AI &amp; Code Intelligence</a:t>
+            </a:r>
+          </a:p>
+          <a:p>
+            <a:pPr>
+              <a:defRPr sz="1000" b="1">
+                <a:solidFill>
+                  <a:srgbClr val="F8FAFC"/>
+                </a:solidFill>
+              </a:defRPr>
+            </a:pPr>
+            <a:r>
+              <a:t>AST Parser &amp; Gemini AI</a:t>
+            </a:r>
+          </a:p>
+          <a:p>
+            <a:pPr>
+              <a:defRPr sz="950">
+                <a:solidFill>
+                  <a:srgbClr val="94A3B8"/>
+                </a:solidFill>
+              </a:defRPr>
+            </a:pPr>
+            <a:r>
+              <a:t>• GitHub REST API v3 repo tree &amp; commit scanning</a:t>
+            </a:r>
+          </a:p>
+          <a:p>
+            <a:pPr>
+              <a:defRPr sz="950">
+                <a:solidFill>
+                  <a:srgbClr val="94A3B8"/>
+                </a:solidFill>
+              </a:defRPr>
+            </a:pPr>
+            <a:r>
+              <a:t>• AST Code Readiness evaluator (0–100 score)</a:t>
+            </a:r>
+          </a:p>
+          <a:p>
+            <a:pPr>
+              <a:defRPr sz="950">
+                <a:solidFill>
+                  <a:srgbClr val="94A3B8"/>
+                </a:solidFill>
+              </a:defRPr>
+            </a:pPr>
+            <a:r>
+              <a:t>• Google Gemini AI 60s flash dossier synthesizer</a:t>
+            </a:r>
+          </a:p>
+          <a:p>
+            <a:pPr>
+              <a:defRPr sz="950">
+                <a:solidFill>
+                  <a:srgbClr val="94A3B8"/>
+                </a:solidFill>
+              </a:defRPr>
+            </a:pPr>
+            <a:r>
+              <a:t>• Graceful fallback heuristic simulation engine</a:t>
+            </a:r>
+          </a:p>
+        </p:txBody>
+      </p:sp>
+      <p:sp>
+        <p:nvSpPr>
+          <p:cNvPr id="12" name="Rounded Rectangle 11"/>
+          <p:cNvSpPr/>
+          <p:nvPr/>
+        </p:nvSpPr>
+        <p:spPr>
+          <a:xfrm>
+            <a:off x="731520" y="4846320"/>
+            <a:ext cx="10728655" cy="1371600"/>
+          </a:xfrm>
+          <a:prstGeom prst="roundRect">
+            <a:avLst/>
+          </a:prstGeom>
+          <a:solidFill>
+            <a:srgbClr val="101A36"/>
+          </a:solidFill>
+          <a:ln>
+            <a:solidFill>
+              <a:srgbClr val="34D399"/>
+            </a:solidFill>
+          </a:ln>
+        </p:spPr>
+        <p:style>
+          <a:lnRef idx="1">
+            <a:schemeClr val="accent1"/>
+          </a:lnRef>
+          <a:fillRef idx="3">
+            <a:schemeClr val="accent1"/>
+          </a:fillRef>
+          <a:effectRef idx="2">
+            <a:schemeClr val="accent1"/>
+          </a:effectRef>
+          <a:fontRef idx="minor">
+            <a:schemeClr val="lt1"/>
+          </a:fontRef>
+        </p:style>
+        <p:txBody>
+          <a:bodyPr rtlCol="0" anchor="ctr"/>
+          <a:lstStyle/>
+          <a:p>
+            <a:pPr algn="ctr"/>
+          </a:p>
+        </p:txBody>
+      </p:sp>
+      <p:sp>
+        <p:nvSpPr>
+          <p:cNvPr id="13" name="TextBox 12"/>
+          <p:cNvSpPr txBox="1"/>
+          <p:nvPr/>
+        </p:nvSpPr>
+        <p:spPr>
+          <a:xfrm>
+            <a:off x="914400" y="4937760"/>
+            <a:ext cx="10362895" cy="1188720"/>
+          </a:xfrm>
+          <a:prstGeom prst="rect">
+            <a:avLst/>
+          </a:prstGeom>
+          <a:noFill/>
+        </p:spPr>
+        <p:txBody>
+          <a:bodyPr wrap="square">
+            <a:spAutoFit/>
+          </a:bodyPr>
+          <a:lstStyle/>
+          <a:p>
+            <a:pPr>
+              <a:defRPr sz="1100" b="1">
+                <a:solidFill>
+                  <a:srgbClr val="34D399"/>
+                </a:solidFill>
+              </a:defRPr>
+            </a:pPr>
+            <a:r>
+              <a:t>LIVE SYSTEM DEMONSTRATION AT HACKSHIFT:</a:t>
+            </a:r>
+          </a:p>
+          <a:p>
+            <a:pPr>
+              <a:defRPr sz="1050">
+                <a:solidFill>
+                  <a:srgbClr val="F8FAFC"/>
+                </a:solidFill>
+              </a:defRPr>
+            </a:pPr>
+            <a:r>
+              <a:t>• Full-Stack Engine running live at http://localhost:3000</a:t>
+            </a:r>
             <a:br/>
-            <a:pPr>
-              <a:defRPr sz="1200">
-                <a:solidFill>
-                  <a:srgbClr val="94A3B8"/>
-                </a:solidFill>
-              </a:defRPr>
-            </a:pPr>
-            <a:r>
-              <a:t>Corporate recruiters list urgent off-campus vacancies targeted specifically at students with proven AST Code Readiness Scores above 90.</a:t>
+            <a:r>
+              <a:t>• 6 Interactive Portals: Student, Alumnus, Founder, Faculty, Recruiter, Institution</a:t>
+            </a:r>
+            <a:br/>
+            <a:r>
+              <a:t>• Real-Time GitHub Code Scanner, Micro-Bounties Escrow, and 1-Click ATS Referral Actions</a:t>
             </a:r>
           </a:p>
         </p:txBody>
@@ -6346,11 +6264,11 @@
             <a:avLst/>
           </a:prstGeom>
           <a:solidFill>
-            <a:srgbClr val="040712"/>
+            <a:srgbClr val="030611"/>
           </a:solidFill>
           <a:ln>
             <a:solidFill>
-              <a:srgbClr val="040712"/>
+              <a:srgbClr val="030611"/>
             </a:solidFill>
           </a:ln>
         </p:spPr>
@@ -6385,7 +6303,7 @@
         <p:spPr>
           <a:xfrm>
             <a:off x="731520" y="365760"/>
-            <a:ext cx="10698480" cy="365760"/>
+            <a:ext cx="10728655" cy="320040"/>
           </a:xfrm>
           <a:prstGeom prst="rect">
             <a:avLst/>
@@ -6393,20 +6311,20 @@
           <a:noFill/>
         </p:spPr>
         <p:txBody>
-          <a:bodyPr wrap="square">
+          <a:bodyPr wrap="none">
             <a:spAutoFit/>
           </a:bodyPr>
           <a:lstStyle/>
           <a:p>
             <a:pPr>
-              <a:defRPr sz="900" b="1">
+              <a:defRPr sz="1000" b="1">
                 <a:solidFill>
                   <a:srgbClr val="F472B6"/>
                 </a:solidFill>
               </a:defRPr>
             </a:pPr>
             <a:r>
-              <a:t>FEATURE SPOTLIGHT 4</a:t>
+              <a:t>ROADMAP &amp; IMPACT   •   07 / 07</a:t>
             </a:r>
           </a:p>
         </p:txBody>
@@ -6419,8 +6337,8 @@
         </p:nvSpPr>
         <p:spPr>
           <a:xfrm>
-            <a:off x="731520" y="685800"/>
-            <a:ext cx="10698480" cy="731520"/>
+            <a:off x="731520" y="658368"/>
+            <a:ext cx="10728655" cy="594360"/>
           </a:xfrm>
           <a:prstGeom prst="rect">
             <a:avLst/>
@@ -6428,20 +6346,20 @@
           <a:noFill/>
         </p:spPr>
         <p:txBody>
-          <a:bodyPr wrap="square">
+          <a:bodyPr wrap="none">
             <a:spAutoFit/>
           </a:bodyPr>
           <a:lstStyle/>
           <a:p>
             <a:pPr>
-              <a:defRPr sz="2400" b="1">
+              <a:defRPr sz="2200" b="1">
                 <a:solidFill>
                   <a:srgbClr val="F8FAFC"/>
                 </a:solidFill>
               </a:defRPr>
             </a:pPr>
             <a:r>
-              <a:t>Institution Impact &amp; Outcome Telemetry</a:t>
+              <a:t>Expected MVP Benefits &amp; Future Horizon</a:t>
             </a:r>
           </a:p>
         </p:txBody>
@@ -6454,8 +6372,8 @@
         </p:nvSpPr>
         <p:spPr>
           <a:xfrm>
-            <a:off x="731520" y="1325880"/>
-            <a:ext cx="10698480" cy="365760"/>
+            <a:off x="731520" y="1234440"/>
+            <a:ext cx="10728655" cy="411480"/>
           </a:xfrm>
           <a:prstGeom prst="rect">
             <a:avLst/>
@@ -6463,20 +6381,20 @@
           <a:noFill/>
         </p:spPr>
         <p:txBody>
-          <a:bodyPr wrap="square">
+          <a:bodyPr wrap="none">
             <a:spAutoFit/>
           </a:bodyPr>
           <a:lstStyle/>
           <a:p>
             <a:pPr>
-              <a:defRPr sz="1200">
+              <a:defRPr sz="1150">
                 <a:solidFill>
                   <a:srgbClr val="94A3B8"/>
                 </a:solidFill>
               </a:defRPr>
             </a:pPr>
             <a:r>
-              <a:t>Transforming college alumni relations from fundraising brochures to real-time accreditation metrics.</a:t>
+              <a:t>“Not just who you know, but who can help you grow. Better Connections. Better Opportunities.”</a:t>
             </a:r>
           </a:p>
         </p:txBody>
@@ -6489,14 +6407,14 @@
         </p:nvSpPr>
         <p:spPr>
           <a:xfrm>
-            <a:off x="731520" y="2011680"/>
-            <a:ext cx="2514600" cy="1645920"/>
+            <a:off x="731520" y="1920240"/>
+            <a:ext cx="5257800" cy="3291840"/>
           </a:xfrm>
           <a:prstGeom prst="roundRect">
             <a:avLst/>
           </a:prstGeom>
           <a:solidFill>
-            <a:srgbClr val="0C1326"/>
+            <a:srgbClr val="0A1024"/>
           </a:solidFill>
           <a:ln>
             <a:solidFill>
@@ -6534,8 +6452,8 @@
         </p:nvSpPr>
         <p:spPr>
           <a:xfrm>
-            <a:off x="822960" y="2194560"/>
-            <a:ext cx="2331720" cy="1280160"/>
+            <a:off x="914400" y="2057400"/>
+            <a:ext cx="4892040" cy="3017520"/>
           </a:xfrm>
           <a:prstGeom prst="rect">
             <a:avLst/>
@@ -6548,27 +6466,63 @@
           </a:bodyPr>
           <a:lstStyle/>
           <a:p>
-            <a:pPr algn="ctr">
-              <a:defRPr sz="2800" b="1">
+            <a:pPr>
+              <a:defRPr sz="1500" b="1">
                 <a:solidFill>
                   <a:srgbClr val="38BDF8"/>
                 </a:solidFill>
               </a:defRPr>
             </a:pPr>
             <a:r>
-              <a:t>342+</a:t>
-            </a:r>
-          </a:p>
-          <a:p>
-            <a:pPr algn="ctr">
-              <a:defRPr sz="1100">
-                <a:solidFill>
-                  <a:srgbClr val="F8FAFC"/>
-                </a:solidFill>
-              </a:defRPr>
-            </a:pPr>
-            <a:r>
-              <a:t>Verified Referrals Tracked</a:t>
+              <a:t>EXPECTED MVP BENEFITS:</a:t>
+            </a:r>
+          </a:p>
+          <a:p>
+            <a:pPr>
+              <a:defRPr sz="1050">
+                <a:solidFill>
+                  <a:srgbClr val="94A3B8"/>
+                </a:solidFill>
+              </a:defRPr>
+            </a:pPr>
+            <a:r>
+              <a:t>✓ Zero-Spam Campus Networking: Replaces unsolicited begging DMs with verified engineering proof-of-work.</a:t>
+            </a:r>
+          </a:p>
+          <a:p>
+            <a:pPr>
+              <a:defRPr sz="1050">
+                <a:solidFill>
+                  <a:srgbClr val="94A3B8"/>
+                </a:solidFill>
+              </a:defRPr>
+            </a:pPr>
+            <a:r>
+              <a:t>✓ 60-Second Referral Decisions: Saves alumni hours of resume screening while protecting their internal company reputation.</a:t>
+            </a:r>
+          </a:p>
+          <a:p>
+            <a:pPr>
+              <a:defRPr sz="1050">
+                <a:solidFill>
+                  <a:srgbClr val="94A3B8"/>
+                </a:solidFill>
+              </a:defRPr>
+            </a:pPr>
+            <a:r>
+              <a:t>✓ Direct Student Monetization: Campus builders earn real stipends solving startup micro-bounties before graduating.</a:t>
+            </a:r>
+          </a:p>
+          <a:p>
+            <a:pPr>
+              <a:defRPr sz="1050">
+                <a:solidFill>
+                  <a:srgbClr val="94A3B8"/>
+                </a:solidFill>
+              </a:defRPr>
+            </a:pPr>
+            <a:r>
+              <a:t>✓ Accreditation-Ready Telemetry: Provides college administrations with instant, audit-grade data for NAAC and NIRF.</a:t>
             </a:r>
           </a:p>
         </p:txBody>
@@ -6581,14 +6535,142 @@
         </p:nvSpPr>
         <p:spPr>
           <a:xfrm>
-            <a:off x="3429000" y="2011680"/>
-            <a:ext cx="2514600" cy="1645920"/>
+            <a:off x="6217920" y="1920240"/>
+            <a:ext cx="5257800" cy="3291840"/>
           </a:xfrm>
           <a:prstGeom prst="roundRect">
             <a:avLst/>
           </a:prstGeom>
           <a:solidFill>
-            <a:srgbClr val="0C1326"/>
+            <a:srgbClr val="0A1024"/>
+          </a:solidFill>
+          <a:ln>
+            <a:solidFill>
+              <a:srgbClr val="C084FC"/>
+            </a:solidFill>
+          </a:ln>
+        </p:spPr>
+        <p:style>
+          <a:lnRef idx="1">
+            <a:schemeClr val="accent1"/>
+          </a:lnRef>
+          <a:fillRef idx="3">
+            <a:schemeClr val="accent1"/>
+          </a:fillRef>
+          <a:effectRef idx="2">
+            <a:schemeClr val="accent1"/>
+          </a:effectRef>
+          <a:fontRef idx="minor">
+            <a:schemeClr val="lt1"/>
+          </a:fontRef>
+        </p:style>
+        <p:txBody>
+          <a:bodyPr rtlCol="0" anchor="ctr"/>
+          <a:lstStyle/>
+          <a:p>
+            <a:pPr algn="ctr"/>
+          </a:p>
+        </p:txBody>
+      </p:sp>
+      <p:sp>
+        <p:nvSpPr>
+          <p:cNvPr id="9" name="TextBox 8"/>
+          <p:cNvSpPr txBox="1"/>
+          <p:nvPr/>
+        </p:nvSpPr>
+        <p:spPr>
+          <a:xfrm>
+            <a:off x="6400800" y="2057400"/>
+            <a:ext cx="4892040" cy="3017520"/>
+          </a:xfrm>
+          <a:prstGeom prst="rect">
+            <a:avLst/>
+          </a:prstGeom>
+          <a:noFill/>
+        </p:spPr>
+        <p:txBody>
+          <a:bodyPr wrap="square">
+            <a:spAutoFit/>
+          </a:bodyPr>
+          <a:lstStyle/>
+          <a:p>
+            <a:pPr>
+              <a:defRPr sz="1500" b="1">
+                <a:solidFill>
+                  <a:srgbClr val="C084FC"/>
+                </a:solidFill>
+              </a:defRPr>
+            </a:pPr>
+            <a:r>
+              <a:t>FUTURE HORIZON &amp; SCALABILITY:</a:t>
+            </a:r>
+          </a:p>
+          <a:p>
+            <a:pPr>
+              <a:defRPr sz="1050">
+                <a:solidFill>
+                  <a:srgbClr val="94A3B8"/>
+                </a:solidFill>
+              </a:defRPr>
+            </a:pPr>
+            <a:r>
+              <a:t>🚀 AI Skill-Gap Diagnostics: Compares candidate code against corporate hiring benchmarks and auto-assigns targeted learning modules.</a:t>
+            </a:r>
+          </a:p>
+          <a:p>
+            <a:pPr>
+              <a:defRPr sz="1050">
+                <a:solidFill>
+                  <a:srgbClr val="94A3B8"/>
+                </a:solidFill>
+              </a:defRPr>
+            </a:pPr>
+            <a:r>
+              <a:t>🚀 Federated Multi-Campus Network: Interconnects university nodes across Delhi-NCR and global alumni chapters.</a:t>
+            </a:r>
+          </a:p>
+          <a:p>
+            <a:pPr>
+              <a:defRPr sz="1050">
+                <a:solidFill>
+                  <a:srgbClr val="94A3B8"/>
+                </a:solidFill>
+              </a:defRPr>
+            </a:pPr>
+            <a:r>
+              <a:t>🚀 Automated Calendar Sync: 1-click scheduling for alumni mock interviews and capstone checkpoint reviews.</a:t>
+            </a:r>
+          </a:p>
+          <a:p>
+            <a:pPr>
+              <a:defRPr sz="1050">
+                <a:solidFill>
+                  <a:srgbClr val="94A3B8"/>
+                </a:solidFill>
+              </a:defRPr>
+            </a:pPr>
+            <a:r>
+              <a:t>🚀 Smart Contract Escrow: Automated bounty payouts upon merged GitHub Pull Requests.</a:t>
+            </a:r>
+          </a:p>
+        </p:txBody>
+      </p:sp>
+      <p:sp>
+        <p:nvSpPr>
+          <p:cNvPr id="10" name="Rounded Rectangle 9"/>
+          <p:cNvSpPr/>
+          <p:nvPr/>
+        </p:nvSpPr>
+        <p:spPr>
+          <a:xfrm>
+            <a:off x="731520" y="5394960"/>
+            <a:ext cx="10728655" cy="914400"/>
+          </a:xfrm>
+          <a:prstGeom prst="roundRect">
+            <a:avLst/>
+          </a:prstGeom>
+          <a:solidFill>
+            <a:srgbClr val="101A36"/>
           </a:solidFill>
           <a:ln>
             <a:solidFill>
@@ -6620,14 +6702,14 @@
       </p:sp>
       <p:sp>
         <p:nvSpPr>
-          <p:cNvPr id="9" name="TextBox 8"/>
+          <p:cNvPr id="11" name="TextBox 10"/>
           <p:cNvSpPr txBox="1"/>
           <p:nvPr/>
         </p:nvSpPr>
         <p:spPr>
           <a:xfrm>
-            <a:off x="3520440" y="2194560"/>
-            <a:ext cx="2331720" cy="1280160"/>
+            <a:off x="914400" y="5440680"/>
+            <a:ext cx="10362895" cy="822960"/>
           </a:xfrm>
           <a:prstGeom prst="rect">
             <a:avLst/>
@@ -6641,1397 +6723,26 @@
           <a:lstStyle/>
           <a:p>
             <a:pPr algn="ctr">
-              <a:defRPr sz="2800" b="1">
+              <a:defRPr sz="1200" b="1">
+                <a:solidFill>
+                  <a:srgbClr val="F8FAFC"/>
+                </a:solidFill>
+              </a:defRPr>
+            </a:pPr>
+            <a:r>
+              <a:t>LinkX   •   HACKSHIFT HACKATHON   •   IIIT DELHI</a:t>
+            </a:r>
+          </a:p>
+          <a:p>
+            <a:pPr algn="ctr">
+              <a:defRPr sz="1100" b="1">
                 <a:solidFill>
                   <a:srgbClr val="F472B6"/>
                 </a:solidFill>
               </a:defRPr>
             </a:pPr>
             <a:r>
-              <a:t>₹4.2L+</a:t>
-            </a:r>
-          </a:p>
-          <a:p>
-            <a:pPr algn="ctr">
-              <a:defRPr sz="1100">
-                <a:solidFill>
-                  <a:srgbClr val="F8FAFC"/>
-                </a:solidFill>
-              </a:defRPr>
-            </a:pPr>
-            <a:r>
-              <a:t>Student Bounty Earnings</a:t>
-            </a:r>
-          </a:p>
-        </p:txBody>
-      </p:sp>
-      <p:sp>
-        <p:nvSpPr>
-          <p:cNvPr id="10" name="Rounded Rectangle 9"/>
-          <p:cNvSpPr/>
-          <p:nvPr/>
-        </p:nvSpPr>
-        <p:spPr>
-          <a:xfrm>
-            <a:off x="6126480" y="2011680"/>
-            <a:ext cx="2514600" cy="1645920"/>
-          </a:xfrm>
-          <a:prstGeom prst="roundRect">
-            <a:avLst/>
-          </a:prstGeom>
-          <a:solidFill>
-            <a:srgbClr val="0C1326"/>
-          </a:solidFill>
-          <a:ln>
-            <a:solidFill>
-              <a:srgbClr val="C084FC"/>
-            </a:solidFill>
-          </a:ln>
-        </p:spPr>
-        <p:style>
-          <a:lnRef idx="1">
-            <a:schemeClr val="accent1"/>
-          </a:lnRef>
-          <a:fillRef idx="3">
-            <a:schemeClr val="accent1"/>
-          </a:fillRef>
-          <a:effectRef idx="2">
-            <a:schemeClr val="accent1"/>
-          </a:effectRef>
-          <a:fontRef idx="minor">
-            <a:schemeClr val="lt1"/>
-          </a:fontRef>
-        </p:style>
-        <p:txBody>
-          <a:bodyPr rtlCol="0" anchor="ctr"/>
-          <a:lstStyle/>
-          <a:p>
-            <a:pPr algn="ctr"/>
-          </a:p>
-        </p:txBody>
-      </p:sp>
-      <p:sp>
-        <p:nvSpPr>
-          <p:cNvPr id="11" name="TextBox 10"/>
-          <p:cNvSpPr txBox="1"/>
-          <p:nvPr/>
-        </p:nvSpPr>
-        <p:spPr>
-          <a:xfrm>
-            <a:off x="6217920" y="2194560"/>
-            <a:ext cx="2331720" cy="1280160"/>
-          </a:xfrm>
-          <a:prstGeom prst="rect">
-            <a:avLst/>
-          </a:prstGeom>
-          <a:noFill/>
-        </p:spPr>
-        <p:txBody>
-          <a:bodyPr wrap="square">
-            <a:spAutoFit/>
-          </a:bodyPr>
-          <a:lstStyle/>
-          <a:p>
-            <a:pPr algn="ctr">
-              <a:defRPr sz="2800" b="1">
-                <a:solidFill>
-                  <a:srgbClr val="C084FC"/>
-                </a:solidFill>
-              </a:defRPr>
-            </a:pPr>
-            <a:r>
-              <a:t>78%</a:t>
-            </a:r>
-          </a:p>
-          <a:p>
-            <a:pPr algn="ctr">
-              <a:defRPr sz="1100">
-                <a:solidFill>
-                  <a:srgbClr val="F8FAFC"/>
-                </a:solidFill>
-              </a:defRPr>
-            </a:pPr>
-            <a:r>
-              <a:t>Alumni Referral Conversion</a:t>
-            </a:r>
-          </a:p>
-        </p:txBody>
-      </p:sp>
-      <p:sp>
-        <p:nvSpPr>
-          <p:cNvPr id="12" name="Rounded Rectangle 11"/>
-          <p:cNvSpPr/>
-          <p:nvPr/>
-        </p:nvSpPr>
-        <p:spPr>
-          <a:xfrm>
-            <a:off x="8823960" y="2011680"/>
-            <a:ext cx="2514600" cy="1645920"/>
-          </a:xfrm>
-          <a:prstGeom prst="roundRect">
-            <a:avLst/>
-          </a:prstGeom>
-          <a:solidFill>
-            <a:srgbClr val="0C1326"/>
-          </a:solidFill>
-          <a:ln>
-            <a:solidFill>
-              <a:srgbClr val="38BDF8"/>
-            </a:solidFill>
-          </a:ln>
-        </p:spPr>
-        <p:style>
-          <a:lnRef idx="1">
-            <a:schemeClr val="accent1"/>
-          </a:lnRef>
-          <a:fillRef idx="3">
-            <a:schemeClr val="accent1"/>
-          </a:fillRef>
-          <a:effectRef idx="2">
-            <a:schemeClr val="accent1"/>
-          </a:effectRef>
-          <a:fontRef idx="minor">
-            <a:schemeClr val="lt1"/>
-          </a:fontRef>
-        </p:style>
-        <p:txBody>
-          <a:bodyPr rtlCol="0" anchor="ctr"/>
-          <a:lstStyle/>
-          <a:p>
-            <a:pPr algn="ctr"/>
-          </a:p>
-        </p:txBody>
-      </p:sp>
-      <p:sp>
-        <p:nvSpPr>
-          <p:cNvPr id="13" name="TextBox 12"/>
-          <p:cNvSpPr txBox="1"/>
-          <p:nvPr/>
-        </p:nvSpPr>
-        <p:spPr>
-          <a:xfrm>
-            <a:off x="8915400" y="2194560"/>
-            <a:ext cx="2331720" cy="1280160"/>
-          </a:xfrm>
-          <a:prstGeom prst="rect">
-            <a:avLst/>
-          </a:prstGeom>
-          <a:noFill/>
-        </p:spPr>
-        <p:txBody>
-          <a:bodyPr wrap="square">
-            <a:spAutoFit/>
-          </a:bodyPr>
-          <a:lstStyle/>
-          <a:p>
-            <a:pPr algn="ctr">
-              <a:defRPr sz="2800" b="1">
-                <a:solidFill>
-                  <a:srgbClr val="38BDF8"/>
-                </a:solidFill>
-              </a:defRPr>
-            </a:pPr>
-            <a:r>
-              <a:t>1,240+</a:t>
-            </a:r>
-          </a:p>
-          <a:p>
-            <a:pPr algn="ctr">
-              <a:defRPr sz="1100">
-                <a:solidFill>
-                  <a:srgbClr val="F8FAFC"/>
-                </a:solidFill>
-              </a:defRPr>
-            </a:pPr>
-            <a:r>
-              <a:t>Active Campus Builders</a:t>
-            </a:r>
-          </a:p>
-        </p:txBody>
-      </p:sp>
-      <p:sp>
-        <p:nvSpPr>
-          <p:cNvPr id="14" name="Rounded Rectangle 13"/>
-          <p:cNvSpPr/>
-          <p:nvPr/>
-        </p:nvSpPr>
-        <p:spPr>
-          <a:xfrm>
-            <a:off x="731520" y="3931920"/>
-            <a:ext cx="10728655" cy="2194560"/>
-          </a:xfrm>
-          <a:prstGeom prst="roundRect">
-            <a:avLst/>
-          </a:prstGeom>
-          <a:solidFill>
-            <a:srgbClr val="111C36"/>
-          </a:solidFill>
-          <a:ln>
-            <a:solidFill>
-              <a:srgbClr val="6366F1"/>
-            </a:solidFill>
-          </a:ln>
-        </p:spPr>
-        <p:style>
-          <a:lnRef idx="1">
-            <a:schemeClr val="accent1"/>
-          </a:lnRef>
-          <a:fillRef idx="3">
-            <a:schemeClr val="accent1"/>
-          </a:fillRef>
-          <a:effectRef idx="2">
-            <a:schemeClr val="accent1"/>
-          </a:effectRef>
-          <a:fontRef idx="minor">
-            <a:schemeClr val="lt1"/>
-          </a:fontRef>
-        </p:style>
-        <p:txBody>
-          <a:bodyPr rtlCol="0" anchor="ctr"/>
-          <a:lstStyle/>
-          <a:p>
-            <a:pPr algn="ctr"/>
-          </a:p>
-        </p:txBody>
-      </p:sp>
-      <p:sp>
-        <p:nvSpPr>
-          <p:cNvPr id="15" name="TextBox 14"/>
-          <p:cNvSpPr txBox="1"/>
-          <p:nvPr/>
-        </p:nvSpPr>
-        <p:spPr>
-          <a:xfrm>
-            <a:off x="1005840" y="4114800"/>
-            <a:ext cx="10149840" cy="1828800"/>
-          </a:xfrm>
-          <a:prstGeom prst="rect">
-            <a:avLst/>
-          </a:prstGeom>
-          <a:noFill/>
-        </p:spPr>
-        <p:txBody>
-          <a:bodyPr wrap="square">
-            <a:spAutoFit/>
-          </a:bodyPr>
-          <a:lstStyle/>
-          <a:p>
-            <a:pPr>
-              <a:defRPr sz="1600" b="1">
-                <a:solidFill>
-                  <a:srgbClr val="F8FAFC"/>
-                </a:solidFill>
-              </a:defRPr>
-            </a:pPr>
-            <a:r>
-              <a:t>Why Colleges &amp; Universities Pay for LinkX:</a:t>
-            </a:r>
-          </a:p>
-          <a:p>
-            <a:pPr>
-              <a:defRPr sz="1200">
-                <a:solidFill>
-                  <a:srgbClr val="94A3B8"/>
-                </a:solidFill>
-              </a:defRPr>
-            </a:pPr>
-            <a:r>
-              <a:t>1. Instant NAAC &amp; NIRF Data: Generates audit-ready evidence on alumni engagement, industry co-guides, and student employment.</a:t>
-            </a:r>
-          </a:p>
-          <a:p>
-            <a:pPr>
-              <a:defRPr sz="1200">
-                <a:solidFill>
-                  <a:srgbClr val="94A3B8"/>
-                </a:solidFill>
-              </a:defRPr>
-            </a:pPr>
-            <a:r>
-              <a:t>2. Geographic Density Mapping: Tracks alumni hubs across Bangalore, Gurgaon, San Francisco, and London for regional alumni chapter meetings.</a:t>
-            </a:r>
-          </a:p>
-          <a:p>
-            <a:pPr>
-              <a:defRPr sz="1200">
-                <a:solidFill>
-                  <a:srgbClr val="94A3B8"/>
-                </a:solidFill>
-              </a:defRPr>
-            </a:pPr>
-            <a:r>
-              <a:t>3. High-Value Industry Placement Rate: Increases Tier-1 placement conversions by up to 3x compared to unmoderated on-campus drives.</a:t>
-            </a:r>
-          </a:p>
-        </p:txBody>
-      </p:sp>
-    </p:spTree>
-  </p:cSld>
-  <p:clrMapOvr>
-    <a:masterClrMapping/>
-  </p:clrMapOvr>
-</p:sld>
-</file>
-
-<file path=ppt/slides/slide8.xml><?xml version="1.0" encoding="utf-8"?>
-<p:sld xmlns:a="http://schemas.openxmlformats.org/drawingml/2006/main" xmlns:p="http://schemas.openxmlformats.org/presentationml/2006/main" xmlns:r="http://schemas.openxmlformats.org/officeDocument/2006/relationships">
-  <p:cSld>
-    <p:spTree>
-      <p:nvGrpSpPr>
-        <p:cNvPr id="1" name=""/>
-        <p:cNvGrpSpPr/>
-        <p:nvPr/>
-      </p:nvGrpSpPr>
-      <p:grpSpPr/>
-      <p:sp>
-        <p:nvSpPr>
-          <p:cNvPr id="2" name="Rectangle 1"/>
-          <p:cNvSpPr/>
-          <p:nvPr/>
-        </p:nvSpPr>
-        <p:spPr>
-          <a:xfrm>
-            <a:off x="0" y="0"/>
-            <a:ext cx="12191695" cy="6858000"/>
-          </a:xfrm>
-          <a:prstGeom prst="rect">
-            <a:avLst/>
-          </a:prstGeom>
-          <a:solidFill>
-            <a:srgbClr val="040712"/>
-          </a:solidFill>
-          <a:ln>
-            <a:solidFill>
-              <a:srgbClr val="040712"/>
-            </a:solidFill>
-          </a:ln>
-        </p:spPr>
-        <p:style>
-          <a:lnRef idx="1">
-            <a:schemeClr val="accent1"/>
-          </a:lnRef>
-          <a:fillRef idx="3">
-            <a:schemeClr val="accent1"/>
-          </a:fillRef>
-          <a:effectRef idx="2">
-            <a:schemeClr val="accent1"/>
-          </a:effectRef>
-          <a:fontRef idx="minor">
-            <a:schemeClr val="lt1"/>
-          </a:fontRef>
-        </p:style>
-        <p:txBody>
-          <a:bodyPr rtlCol="0" anchor="ctr"/>
-          <a:lstStyle/>
-          <a:p>
-            <a:pPr algn="ctr"/>
-          </a:p>
-        </p:txBody>
-      </p:sp>
-      <p:sp>
-        <p:nvSpPr>
-          <p:cNvPr id="3" name="TextBox 2"/>
-          <p:cNvSpPr txBox="1"/>
-          <p:nvPr/>
-        </p:nvSpPr>
-        <p:spPr>
-          <a:xfrm>
-            <a:off x="731520" y="365760"/>
-            <a:ext cx="10698480" cy="365760"/>
-          </a:xfrm>
-          <a:prstGeom prst="rect">
-            <a:avLst/>
-          </a:prstGeom>
-          <a:noFill/>
-        </p:spPr>
-        <p:txBody>
-          <a:bodyPr wrap="square">
-            <a:spAutoFit/>
-          </a:bodyPr>
-          <a:lstStyle/>
-          <a:p>
-            <a:pPr>
-              <a:defRPr sz="900" b="1">
-                <a:solidFill>
-                  <a:srgbClr val="F472B6"/>
-                </a:solidFill>
-              </a:defRPr>
-            </a:pPr>
-            <a:r>
-              <a:t>ENGINEERING EXCELLENCE</a:t>
-            </a:r>
-          </a:p>
-        </p:txBody>
-      </p:sp>
-      <p:sp>
-        <p:nvSpPr>
-          <p:cNvPr id="4" name="TextBox 3"/>
-          <p:cNvSpPr txBox="1"/>
-          <p:nvPr/>
-        </p:nvSpPr>
-        <p:spPr>
-          <a:xfrm>
-            <a:off x="731520" y="685800"/>
-            <a:ext cx="10698480" cy="731520"/>
-          </a:xfrm>
-          <a:prstGeom prst="rect">
-            <a:avLst/>
-          </a:prstGeom>
-          <a:noFill/>
-        </p:spPr>
-        <p:txBody>
-          <a:bodyPr wrap="square">
-            <a:spAutoFit/>
-          </a:bodyPr>
-          <a:lstStyle/>
-          <a:p>
-            <a:pPr>
-              <a:defRPr sz="2400" b="1">
-                <a:solidFill>
-                  <a:srgbClr val="F8FAFC"/>
-                </a:solidFill>
-              </a:defRPr>
-            </a:pPr>
-            <a:r>
-              <a:t>System Architecture &amp; Production Tech Stack</a:t>
-            </a:r>
-          </a:p>
-        </p:txBody>
-      </p:sp>
-      <p:sp>
-        <p:nvSpPr>
-          <p:cNvPr id="5" name="TextBox 4"/>
-          <p:cNvSpPr txBox="1"/>
-          <p:nvPr/>
-        </p:nvSpPr>
-        <p:spPr>
-          <a:xfrm>
-            <a:off x="731520" y="1325880"/>
-            <a:ext cx="10698480" cy="365760"/>
-          </a:xfrm>
-          <a:prstGeom prst="rect">
-            <a:avLst/>
-          </a:prstGeom>
-          <a:noFill/>
-        </p:spPr>
-        <p:txBody>
-          <a:bodyPr wrap="square">
-            <a:spAutoFit/>
-          </a:bodyPr>
-          <a:lstStyle/>
-          <a:p>
-            <a:pPr>
-              <a:defRPr sz="1200">
-                <a:solidFill>
-                  <a:srgbClr val="94A3B8"/>
-                </a:solidFill>
-              </a:defRPr>
-            </a:pPr>
-            <a:r>
-              <a:t>High-velocity, zero-bundle latency architecture designed for real-world scale.</a:t>
-            </a:r>
-          </a:p>
-        </p:txBody>
-      </p:sp>
-      <p:sp>
-        <p:nvSpPr>
-          <p:cNvPr id="6" name="Rounded Rectangle 5"/>
-          <p:cNvSpPr/>
-          <p:nvPr/>
-        </p:nvSpPr>
-        <p:spPr>
-          <a:xfrm>
-            <a:off x="731520" y="2011680"/>
-            <a:ext cx="3429000" cy="4023360"/>
-          </a:xfrm>
-          <a:prstGeom prst="roundRect">
-            <a:avLst/>
-          </a:prstGeom>
-          <a:solidFill>
-            <a:srgbClr val="0C1326"/>
-          </a:solidFill>
-          <a:ln>
-            <a:solidFill>
-              <a:srgbClr val="38BDF8"/>
-            </a:solidFill>
-          </a:ln>
-        </p:spPr>
-        <p:style>
-          <a:lnRef idx="1">
-            <a:schemeClr val="accent1"/>
-          </a:lnRef>
-          <a:fillRef idx="3">
-            <a:schemeClr val="accent1"/>
-          </a:fillRef>
-          <a:effectRef idx="2">
-            <a:schemeClr val="accent1"/>
-          </a:effectRef>
-          <a:fontRef idx="minor">
-            <a:schemeClr val="lt1"/>
-          </a:fontRef>
-        </p:style>
-        <p:txBody>
-          <a:bodyPr rtlCol="0" anchor="ctr"/>
-          <a:lstStyle/>
-          <a:p>
-            <a:pPr algn="ctr"/>
-          </a:p>
-        </p:txBody>
-      </p:sp>
-      <p:sp>
-        <p:nvSpPr>
-          <p:cNvPr id="7" name="TextBox 6"/>
-          <p:cNvSpPr txBox="1"/>
-          <p:nvPr/>
-        </p:nvSpPr>
-        <p:spPr>
-          <a:xfrm>
-            <a:off x="914400" y="2194560"/>
-            <a:ext cx="3063240" cy="3657600"/>
-          </a:xfrm>
-          <a:prstGeom prst="rect">
-            <a:avLst/>
-          </a:prstGeom>
-          <a:noFill/>
-        </p:spPr>
-        <p:txBody>
-          <a:bodyPr wrap="square">
-            <a:spAutoFit/>
-          </a:bodyPr>
-          <a:lstStyle/>
-          <a:p>
-            <a:pPr>
-              <a:defRPr sz="1600" b="1">
-                <a:solidFill>
-                  <a:srgbClr val="38BDF8"/>
-                </a:solidFill>
-              </a:defRPr>
-            </a:pPr>
-            <a:r>
-              <a:t>Frontend Engine</a:t>
-            </a:r>
-          </a:p>
-          <a:p>
-            <a:pPr>
-              <a:defRPr sz="1100" b="1">
-                <a:solidFill>
-                  <a:srgbClr val="F8FAFC"/>
-                </a:solidFill>
-              </a:defRPr>
-            </a:pPr>
-            <a:r>
-              <a:t>Modern ES6+ SPA &amp; React 19</a:t>
-            </a:r>
-          </a:p>
-          <a:p>
-            <a:pPr>
-              <a:defRPr sz="1100">
-                <a:solidFill>
-                  <a:srgbClr val="94A3B8"/>
-                </a:solidFill>
-              </a:defRPr>
-            </a:pPr>
-            <a:r>
-              <a:t>• Tailwind CSS Cyber Obsidian design tokens</a:t>
-            </a:r>
-          </a:p>
-          <a:p>
-            <a:pPr>
-              <a:defRPr sz="1100">
-                <a:solidFill>
-                  <a:srgbClr val="94A3B8"/>
-                </a:solidFill>
-              </a:defRPr>
-            </a:pPr>
-            <a:r>
-              <a:t>• Hardware-accelerated CSS mesh gradients &amp; orbs</a:t>
-            </a:r>
-          </a:p>
-          <a:p>
-            <a:pPr>
-              <a:defRPr sz="1100">
-                <a:solidFill>
-                  <a:srgbClr val="94A3B8"/>
-                </a:solidFill>
-              </a:defRPr>
-            </a:pPr>
-            <a:r>
-              <a:t>• Lucide icons &amp; responsive RBAC layouts</a:t>
-            </a:r>
-          </a:p>
-          <a:p>
-            <a:pPr>
-              <a:defRPr sz="1100">
-                <a:solidFill>
-                  <a:srgbClr val="94A3B8"/>
-                </a:solidFill>
-              </a:defRPr>
-            </a:pPr>
-            <a:r>
-              <a:t>• Sub-50ms DOM updates &amp; zero bundle lag</a:t>
-            </a:r>
-          </a:p>
-        </p:txBody>
-      </p:sp>
-      <p:sp>
-        <p:nvSpPr>
-          <p:cNvPr id="8" name="Rounded Rectangle 7"/>
-          <p:cNvSpPr/>
-          <p:nvPr/>
-        </p:nvSpPr>
-        <p:spPr>
-          <a:xfrm>
-            <a:off x="4343400" y="2011680"/>
-            <a:ext cx="3429000" cy="4023360"/>
-          </a:xfrm>
-          <a:prstGeom prst="roundRect">
-            <a:avLst/>
-          </a:prstGeom>
-          <a:solidFill>
-            <a:srgbClr val="0C1326"/>
-          </a:solidFill>
-          <a:ln>
-            <a:solidFill>
-              <a:srgbClr val="C084FC"/>
-            </a:solidFill>
-          </a:ln>
-        </p:spPr>
-        <p:style>
-          <a:lnRef idx="1">
-            <a:schemeClr val="accent1"/>
-          </a:lnRef>
-          <a:fillRef idx="3">
-            <a:schemeClr val="accent1"/>
-          </a:fillRef>
-          <a:effectRef idx="2">
-            <a:schemeClr val="accent1"/>
-          </a:effectRef>
-          <a:fontRef idx="minor">
-            <a:schemeClr val="lt1"/>
-          </a:fontRef>
-        </p:style>
-        <p:txBody>
-          <a:bodyPr rtlCol="0" anchor="ctr"/>
-          <a:lstStyle/>
-          <a:p>
-            <a:pPr algn="ctr"/>
-          </a:p>
-        </p:txBody>
-      </p:sp>
-      <p:sp>
-        <p:nvSpPr>
-          <p:cNvPr id="9" name="TextBox 8"/>
-          <p:cNvSpPr txBox="1"/>
-          <p:nvPr/>
-        </p:nvSpPr>
-        <p:spPr>
-          <a:xfrm>
-            <a:off x="4526280" y="2194560"/>
-            <a:ext cx="3063240" cy="3657600"/>
-          </a:xfrm>
-          <a:prstGeom prst="rect">
-            <a:avLst/>
-          </a:prstGeom>
-          <a:noFill/>
-        </p:spPr>
-        <p:txBody>
-          <a:bodyPr wrap="square">
-            <a:spAutoFit/>
-          </a:bodyPr>
-          <a:lstStyle/>
-          <a:p>
-            <a:pPr>
-              <a:defRPr sz="1600" b="1">
-                <a:solidFill>
-                  <a:srgbClr val="C084FC"/>
-                </a:solidFill>
-              </a:defRPr>
-            </a:pPr>
-            <a:r>
-              <a:t>Backend &amp; REST API</a:t>
-            </a:r>
-          </a:p>
-          <a:p>
-            <a:pPr>
-              <a:defRPr sz="1100" b="1">
-                <a:solidFill>
-                  <a:srgbClr val="F8FAFC"/>
-                </a:solidFill>
-              </a:defRPr>
-            </a:pPr>
-            <a:r>
-              <a:t>Node.js &amp; Express REST Core</a:t>
-            </a:r>
-          </a:p>
-          <a:p>
-            <a:pPr>
-              <a:defRPr sz="1100">
-                <a:solidFill>
-                  <a:srgbClr val="94A3B8"/>
-                </a:solidFill>
-              </a:defRPr>
-            </a:pPr>
-            <a:r>
-              <a:t>• ES Modules architecture (v20+)</a:t>
-            </a:r>
-          </a:p>
-          <a:p>
-            <a:pPr>
-              <a:defRPr sz="1100">
-                <a:solidFill>
-                  <a:srgbClr val="94A3B8"/>
-                </a:solidFill>
-              </a:defRPr>
-            </a:pPr>
-            <a:r>
-              <a:t>• Role-Based Access Control (RBAC) across 6 roles</a:t>
-            </a:r>
-          </a:p>
-          <a:p>
-            <a:pPr>
-              <a:defRPr sz="1100">
-                <a:solidFill>
-                  <a:srgbClr val="94A3B8"/>
-                </a:solidFill>
-              </a:defRPr>
-            </a:pPr>
-            <a:r>
-              <a:t>• Persistent JSON database engine with ACID safety</a:t>
-            </a:r>
-          </a:p>
-          <a:p>
-            <a:pPr>
-              <a:defRPr sz="1100">
-                <a:solidFill>
-                  <a:srgbClr val="94A3B8"/>
-                </a:solidFill>
-              </a:defRPr>
-            </a:pPr>
-            <a:r>
-              <a:t>• High-throughput REST API with CORS &amp; security</a:t>
-            </a:r>
-          </a:p>
-        </p:txBody>
-      </p:sp>
-      <p:sp>
-        <p:nvSpPr>
-          <p:cNvPr id="10" name="Rounded Rectangle 9"/>
-          <p:cNvSpPr/>
-          <p:nvPr/>
-        </p:nvSpPr>
-        <p:spPr>
-          <a:xfrm>
-            <a:off x="7955280" y="2011680"/>
-            <a:ext cx="3429000" cy="4023360"/>
-          </a:xfrm>
-          <a:prstGeom prst="roundRect">
-            <a:avLst/>
-          </a:prstGeom>
-          <a:solidFill>
-            <a:srgbClr val="0C1326"/>
-          </a:solidFill>
-          <a:ln>
-            <a:solidFill>
-              <a:srgbClr val="F472B6"/>
-            </a:solidFill>
-          </a:ln>
-        </p:spPr>
-        <p:style>
-          <a:lnRef idx="1">
-            <a:schemeClr val="accent1"/>
-          </a:lnRef>
-          <a:fillRef idx="3">
-            <a:schemeClr val="accent1"/>
-          </a:fillRef>
-          <a:effectRef idx="2">
-            <a:schemeClr val="accent1"/>
-          </a:effectRef>
-          <a:fontRef idx="minor">
-            <a:schemeClr val="lt1"/>
-          </a:fontRef>
-        </p:style>
-        <p:txBody>
-          <a:bodyPr rtlCol="0" anchor="ctr"/>
-          <a:lstStyle/>
-          <a:p>
-            <a:pPr algn="ctr"/>
-          </a:p>
-        </p:txBody>
-      </p:sp>
-      <p:sp>
-        <p:nvSpPr>
-          <p:cNvPr id="11" name="TextBox 10"/>
-          <p:cNvSpPr txBox="1"/>
-          <p:nvPr/>
-        </p:nvSpPr>
-        <p:spPr>
-          <a:xfrm>
-            <a:off x="8138160" y="2194560"/>
-            <a:ext cx="3063240" cy="3657600"/>
-          </a:xfrm>
-          <a:prstGeom prst="rect">
-            <a:avLst/>
-          </a:prstGeom>
-          <a:noFill/>
-        </p:spPr>
-        <p:txBody>
-          <a:bodyPr wrap="square">
-            <a:spAutoFit/>
-          </a:bodyPr>
-          <a:lstStyle/>
-          <a:p>
-            <a:pPr>
-              <a:defRPr sz="1600" b="1">
-                <a:solidFill>
-                  <a:srgbClr val="F472B6"/>
-                </a:solidFill>
-              </a:defRPr>
-            </a:pPr>
-            <a:r>
-              <a:t>Intelligence &amp; Analysis</a:t>
-            </a:r>
-          </a:p>
-          <a:p>
-            <a:pPr>
-              <a:defRPr sz="1100" b="1">
-                <a:solidFill>
-                  <a:srgbClr val="F8FAFC"/>
-                </a:solidFill>
-              </a:defRPr>
-            </a:pPr>
-            <a:r>
-              <a:t>AST Code Scanner &amp; Gemini AI</a:t>
-            </a:r>
-          </a:p>
-          <a:p>
-            <a:pPr>
-              <a:defRPr sz="1100">
-                <a:solidFill>
-                  <a:srgbClr val="94A3B8"/>
-                </a:solidFill>
-              </a:defRPr>
-            </a:pPr>
-            <a:r>
-              <a:t>• GitHub REST API v3 repo tree &amp; commit parsing</a:t>
-            </a:r>
-          </a:p>
-          <a:p>
-            <a:pPr>
-              <a:defRPr sz="1100">
-                <a:solidFill>
-                  <a:srgbClr val="94A3B8"/>
-                </a:solidFill>
-              </a:defRPr>
-            </a:pPr>
-            <a:r>
-              <a:t>• AST heuristic code complexity &amp; readiness scanner</a:t>
-            </a:r>
-          </a:p>
-          <a:p>
-            <a:pPr>
-              <a:defRPr sz="1100">
-                <a:solidFill>
-                  <a:srgbClr val="94A3B8"/>
-                </a:solidFill>
-              </a:defRPr>
-            </a:pPr>
-            <a:r>
-              <a:t>• Google Gemini AI LLM dossier summarizer</a:t>
-            </a:r>
-          </a:p>
-          <a:p>
-            <a:pPr>
-              <a:defRPr sz="1100">
-                <a:solidFill>
-                  <a:srgbClr val="94A3B8"/>
-                </a:solidFill>
-              </a:defRPr>
-            </a:pPr>
-            <a:r>
-              <a:t>• Automated fallback heuristic engine</a:t>
-            </a:r>
-          </a:p>
-        </p:txBody>
-      </p:sp>
-    </p:spTree>
-  </p:cSld>
-  <p:clrMapOvr>
-    <a:masterClrMapping/>
-  </p:clrMapOvr>
-</p:sld>
-</file>
-
-<file path=ppt/slides/slide9.xml><?xml version="1.0" encoding="utf-8"?>
-<p:sld xmlns:a="http://schemas.openxmlformats.org/drawingml/2006/main" xmlns:p="http://schemas.openxmlformats.org/presentationml/2006/main" xmlns:r="http://schemas.openxmlformats.org/officeDocument/2006/relationships">
-  <p:cSld>
-    <p:spTree>
-      <p:nvGrpSpPr>
-        <p:cNvPr id="1" name=""/>
-        <p:cNvGrpSpPr/>
-        <p:nvPr/>
-      </p:nvGrpSpPr>
-      <p:grpSpPr/>
-      <p:sp>
-        <p:nvSpPr>
-          <p:cNvPr id="2" name="Rectangle 1"/>
-          <p:cNvSpPr/>
-          <p:nvPr/>
-        </p:nvSpPr>
-        <p:spPr>
-          <a:xfrm>
-            <a:off x="0" y="0"/>
-            <a:ext cx="12191695" cy="6858000"/>
-          </a:xfrm>
-          <a:prstGeom prst="rect">
-            <a:avLst/>
-          </a:prstGeom>
-          <a:solidFill>
-            <a:srgbClr val="040712"/>
-          </a:solidFill>
-          <a:ln>
-            <a:solidFill>
-              <a:srgbClr val="040712"/>
-            </a:solidFill>
-          </a:ln>
-        </p:spPr>
-        <p:style>
-          <a:lnRef idx="1">
-            <a:schemeClr val="accent1"/>
-          </a:lnRef>
-          <a:fillRef idx="3">
-            <a:schemeClr val="accent1"/>
-          </a:fillRef>
-          <a:effectRef idx="2">
-            <a:schemeClr val="accent1"/>
-          </a:effectRef>
-          <a:fontRef idx="minor">
-            <a:schemeClr val="lt1"/>
-          </a:fontRef>
-        </p:style>
-        <p:txBody>
-          <a:bodyPr rtlCol="0" anchor="ctr"/>
-          <a:lstStyle/>
-          <a:p>
-            <a:pPr algn="ctr"/>
-          </a:p>
-        </p:txBody>
-      </p:sp>
-      <p:sp>
-        <p:nvSpPr>
-          <p:cNvPr id="3" name="TextBox 2"/>
-          <p:cNvSpPr txBox="1"/>
-          <p:nvPr/>
-        </p:nvSpPr>
-        <p:spPr>
-          <a:xfrm>
-            <a:off x="731520" y="365760"/>
-            <a:ext cx="10698480" cy="365760"/>
-          </a:xfrm>
-          <a:prstGeom prst="rect">
-            <a:avLst/>
-          </a:prstGeom>
-          <a:noFill/>
-        </p:spPr>
-        <p:txBody>
-          <a:bodyPr wrap="square">
-            <a:spAutoFit/>
-          </a:bodyPr>
-          <a:lstStyle/>
-          <a:p>
-            <a:pPr>
-              <a:defRPr sz="900" b="1">
-                <a:solidFill>
-                  <a:srgbClr val="F472B6"/>
-                </a:solidFill>
-              </a:defRPr>
-            </a:pPr>
-            <a:r>
-              <a:t>COMMERCIAL VIABILITY</a:t>
-            </a:r>
-          </a:p>
-        </p:txBody>
-      </p:sp>
-      <p:sp>
-        <p:nvSpPr>
-          <p:cNvPr id="4" name="TextBox 3"/>
-          <p:cNvSpPr txBox="1"/>
-          <p:nvPr/>
-        </p:nvSpPr>
-        <p:spPr>
-          <a:xfrm>
-            <a:off x="731520" y="685800"/>
-            <a:ext cx="10698480" cy="731520"/>
-          </a:xfrm>
-          <a:prstGeom prst="rect">
-            <a:avLst/>
-          </a:prstGeom>
-          <a:noFill/>
-        </p:spPr>
-        <p:txBody>
-          <a:bodyPr wrap="square">
-            <a:spAutoFit/>
-          </a:bodyPr>
-          <a:lstStyle/>
-          <a:p>
-            <a:pPr>
-              <a:defRPr sz="2400" b="1">
-                <a:solidFill>
-                  <a:srgbClr val="F8FAFC"/>
-                </a:solidFill>
-              </a:defRPr>
-            </a:pPr>
-            <a:r>
-              <a:t>Business Model &amp; Monetization Strategy</a:t>
-            </a:r>
-          </a:p>
-        </p:txBody>
-      </p:sp>
-      <p:sp>
-        <p:nvSpPr>
-          <p:cNvPr id="5" name="TextBox 4"/>
-          <p:cNvSpPr txBox="1"/>
-          <p:nvPr/>
-        </p:nvSpPr>
-        <p:spPr>
-          <a:xfrm>
-            <a:off x="731520" y="1325880"/>
-            <a:ext cx="10698480" cy="365760"/>
-          </a:xfrm>
-          <a:prstGeom prst="rect">
-            <a:avLst/>
-          </a:prstGeom>
-          <a:noFill/>
-        </p:spPr>
-        <p:txBody>
-          <a:bodyPr wrap="square">
-            <a:spAutoFit/>
-          </a:bodyPr>
-          <a:lstStyle/>
-          <a:p>
-            <a:pPr>
-              <a:defRPr sz="1200">
-                <a:solidFill>
-                  <a:srgbClr val="94A3B8"/>
-                </a:solidFill>
-              </a:defRPr>
-            </a:pPr>
-            <a:r>
-              <a:t>A multi-sided economic model providing sustained value to students, alumni, and institutions.</a:t>
-            </a:r>
-          </a:p>
-        </p:txBody>
-      </p:sp>
-      <p:sp>
-        <p:nvSpPr>
-          <p:cNvPr id="6" name="Rounded Rectangle 5"/>
-          <p:cNvSpPr/>
-          <p:nvPr/>
-        </p:nvSpPr>
-        <p:spPr>
-          <a:xfrm>
-            <a:off x="731520" y="2011680"/>
-            <a:ext cx="3429000" cy="4023360"/>
-          </a:xfrm>
-          <a:prstGeom prst="roundRect">
-            <a:avLst/>
-          </a:prstGeom>
-          <a:solidFill>
-            <a:srgbClr val="0C1326"/>
-          </a:solidFill>
-          <a:ln>
-            <a:solidFill>
-              <a:srgbClr val="38BDF8"/>
-            </a:solidFill>
-          </a:ln>
-        </p:spPr>
-        <p:style>
-          <a:lnRef idx="1">
-            <a:schemeClr val="accent1"/>
-          </a:lnRef>
-          <a:fillRef idx="3">
-            <a:schemeClr val="accent1"/>
-          </a:fillRef>
-          <a:effectRef idx="2">
-            <a:schemeClr val="accent1"/>
-          </a:effectRef>
-          <a:fontRef idx="minor">
-            <a:schemeClr val="lt1"/>
-          </a:fontRef>
-        </p:style>
-        <p:txBody>
-          <a:bodyPr rtlCol="0" anchor="ctr"/>
-          <a:lstStyle/>
-          <a:p>
-            <a:pPr algn="ctr"/>
-          </a:p>
-        </p:txBody>
-      </p:sp>
-      <p:sp>
-        <p:nvSpPr>
-          <p:cNvPr id="7" name="TextBox 6"/>
-          <p:cNvSpPr txBox="1"/>
-          <p:nvPr/>
-        </p:nvSpPr>
-        <p:spPr>
-          <a:xfrm>
-            <a:off x="914400" y="2194560"/>
-            <a:ext cx="3063240" cy="3657600"/>
-          </a:xfrm>
-          <a:prstGeom prst="rect">
-            <a:avLst/>
-          </a:prstGeom>
-          <a:noFill/>
-        </p:spPr>
-        <p:txBody>
-          <a:bodyPr wrap="square">
-            <a:spAutoFit/>
-          </a:bodyPr>
-          <a:lstStyle/>
-          <a:p>
-            <a:pPr>
-              <a:defRPr sz="1600" b="1">
-                <a:solidFill>
-                  <a:srgbClr val="38BDF8"/>
-                </a:solidFill>
-              </a:defRPr>
-            </a:pPr>
-            <a:r>
-              <a:t>1. B2B College SaaS License</a:t>
-            </a:r>
-          </a:p>
-          <a:p>
-            <a:pPr>
-              <a:defRPr sz="1100" b="1">
-                <a:solidFill>
-                  <a:srgbClr val="F8FAFC"/>
-                </a:solidFill>
-              </a:defRPr>
-            </a:pPr>
-            <a:r>
-              <a:t>Annual Institutional Subscription</a:t>
-            </a:r>
-          </a:p>
-          <a:p>
-            <a:br/>
-            <a:pPr>
-              <a:defRPr sz="1200">
-                <a:solidFill>
-                  <a:srgbClr val="94A3B8"/>
-                </a:solidFill>
-              </a:defRPr>
-            </a:pPr>
-            <a:r>
-              <a:t>₹3L - ₹10L per university per year for outcome analytics, NIRF/NAAC audit telemetry, and branded institutional alumni command center.</a:t>
-            </a:r>
-          </a:p>
-        </p:txBody>
-      </p:sp>
-      <p:sp>
-        <p:nvSpPr>
-          <p:cNvPr id="8" name="Rounded Rectangle 7"/>
-          <p:cNvSpPr/>
-          <p:nvPr/>
-        </p:nvSpPr>
-        <p:spPr>
-          <a:xfrm>
-            <a:off x="4343400" y="2011680"/>
-            <a:ext cx="3429000" cy="4023360"/>
-          </a:xfrm>
-          <a:prstGeom prst="roundRect">
-            <a:avLst/>
-          </a:prstGeom>
-          <a:solidFill>
-            <a:srgbClr val="0C1326"/>
-          </a:solidFill>
-          <a:ln>
-            <a:solidFill>
-              <a:srgbClr val="F472B6"/>
-            </a:solidFill>
-          </a:ln>
-        </p:spPr>
-        <p:style>
-          <a:lnRef idx="1">
-            <a:schemeClr val="accent1"/>
-          </a:lnRef>
-          <a:fillRef idx="3">
-            <a:schemeClr val="accent1"/>
-          </a:fillRef>
-          <a:effectRef idx="2">
-            <a:schemeClr val="accent1"/>
-          </a:effectRef>
-          <a:fontRef idx="minor">
-            <a:schemeClr val="lt1"/>
-          </a:fontRef>
-        </p:style>
-        <p:txBody>
-          <a:bodyPr rtlCol="0" anchor="ctr"/>
-          <a:lstStyle/>
-          <a:p>
-            <a:pPr algn="ctr"/>
-          </a:p>
-        </p:txBody>
-      </p:sp>
-      <p:sp>
-        <p:nvSpPr>
-          <p:cNvPr id="9" name="TextBox 8"/>
-          <p:cNvSpPr txBox="1"/>
-          <p:nvPr/>
-        </p:nvSpPr>
-        <p:spPr>
-          <a:xfrm>
-            <a:off x="4526280" y="2194560"/>
-            <a:ext cx="3063240" cy="3657600"/>
-          </a:xfrm>
-          <a:prstGeom prst="rect">
-            <a:avLst/>
-          </a:prstGeom>
-          <a:noFill/>
-        </p:spPr>
-        <p:txBody>
-          <a:bodyPr wrap="square">
-            <a:spAutoFit/>
-          </a:bodyPr>
-          <a:lstStyle/>
-          <a:p>
-            <a:pPr>
-              <a:defRPr sz="1600" b="1">
-                <a:solidFill>
-                  <a:srgbClr val="F472B6"/>
-                </a:solidFill>
-              </a:defRPr>
-            </a:pPr>
-            <a:r>
-              <a:t>2. Corporate Recruiter Pass</a:t>
-            </a:r>
-          </a:p>
-          <a:p>
-            <a:pPr>
-              <a:defRPr sz="1100" b="1">
-                <a:solidFill>
-                  <a:srgbClr val="F8FAFC"/>
-                </a:solidFill>
-              </a:defRPr>
-            </a:pPr>
-            <a:r>
-              <a:t>Talent Radar Subscription</a:t>
-            </a:r>
-          </a:p>
-          <a:p>
-            <a:br/>
-            <a:pPr>
-              <a:defRPr sz="1200">
-                <a:solidFill>
-                  <a:srgbClr val="94A3B8"/>
-                </a:solidFill>
-              </a:defRPr>
-            </a:pPr>
-            <a:r>
-              <a:t>₹15,000 / month for corporate hiring teams to filter campus candidates based on verified AST code readiness scores and alumni endorsements.</a:t>
-            </a:r>
-          </a:p>
-        </p:txBody>
-      </p:sp>
-      <p:sp>
-        <p:nvSpPr>
-          <p:cNvPr id="10" name="Rounded Rectangle 9"/>
-          <p:cNvSpPr/>
-          <p:nvPr/>
-        </p:nvSpPr>
-        <p:spPr>
-          <a:xfrm>
-            <a:off x="7955280" y="2011680"/>
-            <a:ext cx="3429000" cy="4023360"/>
-          </a:xfrm>
-          <a:prstGeom prst="roundRect">
-            <a:avLst/>
-          </a:prstGeom>
-          <a:solidFill>
-            <a:srgbClr val="0C1326"/>
-          </a:solidFill>
-          <a:ln>
-            <a:solidFill>
-              <a:srgbClr val="C084FC"/>
-            </a:solidFill>
-          </a:ln>
-        </p:spPr>
-        <p:style>
-          <a:lnRef idx="1">
-            <a:schemeClr val="accent1"/>
-          </a:lnRef>
-          <a:fillRef idx="3">
-            <a:schemeClr val="accent1"/>
-          </a:fillRef>
-          <a:effectRef idx="2">
-            <a:schemeClr val="accent1"/>
-          </a:effectRef>
-          <a:fontRef idx="minor">
-            <a:schemeClr val="lt1"/>
-          </a:fontRef>
-        </p:style>
-        <p:txBody>
-          <a:bodyPr rtlCol="0" anchor="ctr"/>
-          <a:lstStyle/>
-          <a:p>
-            <a:pPr algn="ctr"/>
-          </a:p>
-        </p:txBody>
-      </p:sp>
-      <p:sp>
-        <p:nvSpPr>
-          <p:cNvPr id="11" name="TextBox 10"/>
-          <p:cNvSpPr txBox="1"/>
-          <p:nvPr/>
-        </p:nvSpPr>
-        <p:spPr>
-          <a:xfrm>
-            <a:off x="8138160" y="2194560"/>
-            <a:ext cx="3063240" cy="3657600"/>
-          </a:xfrm>
-          <a:prstGeom prst="rect">
-            <a:avLst/>
-          </a:prstGeom>
-          <a:noFill/>
-        </p:spPr>
-        <p:txBody>
-          <a:bodyPr wrap="square">
-            <a:spAutoFit/>
-          </a:bodyPr>
-          <a:lstStyle/>
-          <a:p>
-            <a:pPr>
-              <a:defRPr sz="1600" b="1">
-                <a:solidFill>
-                  <a:srgbClr val="C084FC"/>
-                </a:solidFill>
-              </a:defRPr>
-            </a:pPr>
-            <a:r>
-              <a:t>3. Bounty Marketplace Fee</a:t>
-            </a:r>
-          </a:p>
-          <a:p>
-            <a:pPr>
-              <a:defRPr sz="1100" b="1">
-                <a:solidFill>
-                  <a:srgbClr val="F8FAFC"/>
-                </a:solidFill>
-              </a:defRPr>
-            </a:pPr>
-            <a:r>
-              <a:t>Escrow Platform Take-Rate</a:t>
-            </a:r>
-          </a:p>
-          <a:p>
-            <a:br/>
-            <a:pPr>
-              <a:defRPr sz="1200">
-                <a:solidFill>
-                  <a:srgbClr val="94A3B8"/>
-                </a:solidFill>
-              </a:defRPr>
-            </a:pPr>
-            <a:r>
-              <a:t>5% - 8% platform fee on all successfully completed and funded freelance micro-bounties and capstone disbursements.</a:t>
+              <a:t>Team: Dhani Varshney  |  Dipika Mourya  |  Ansh Kumar  |  Harsh Pal</a:t>
             </a:r>
           </a:p>
         </p:txBody>
